--- a/results/展示.pptx
+++ b/results/展示.pptx
@@ -4,22 +4,25 @@
   <p:sldMasterIdLst>
     <p:sldMasterId id="2147483648" r:id="rId1"/>
   </p:sldMasterIdLst>
+  <p:notesMasterIdLst>
+    <p:notesMasterId r:id="rId15"/>
+  </p:notesMasterIdLst>
   <p:sldIdLst>
-    <p:sldId id="256" r:id="rId7"/>
-    <p:sldId id="257" r:id="rId9"/>
-    <p:sldId id="258" r:id="rId10"/>
-    <p:sldId id="259" r:id="rId11"/>
-    <p:sldId id="260" r:id="rId12"/>
-    <p:sldId id="261" r:id="rId13"/>
-    <p:sldId id="262" r:id="rId14"/>
-    <p:sldId id="263" r:id="rId15"/>
-    <p:sldId id="264" r:id="rId16"/>
-    <p:sldId id="265" r:id="rId17"/>
-    <p:sldId id="266" r:id="rId18"/>
-    <p:sldId id="267" r:id="rId19"/>
-    <p:sldId id="268" r:id="rId20"/>
+    <p:sldId id="256" r:id="rId2"/>
+    <p:sldId id="257" r:id="rId3"/>
+    <p:sldId id="258" r:id="rId4"/>
+    <p:sldId id="259" r:id="rId5"/>
+    <p:sldId id="260" r:id="rId6"/>
+    <p:sldId id="261" r:id="rId7"/>
+    <p:sldId id="262" r:id="rId8"/>
+    <p:sldId id="263" r:id="rId9"/>
+    <p:sldId id="264" r:id="rId10"/>
+    <p:sldId id="265" r:id="rId11"/>
+    <p:sldId id="266" r:id="rId12"/>
+    <p:sldId id="267" r:id="rId13"/>
+    <p:sldId id="268" r:id="rId14"/>
   </p:sldIdLst>
-  <p:sldSz cx="12191695" cy="6858000" type="screen4x3"/>
+  <p:sldSz cx="12192000" cy="6858000"/>
   <p:notesSz cx="6858000" cy="9144000"/>
   <p:defaultTextStyle>
     <a:defPPr>
@@ -116,11 +119,27 @@
       </a:defRPr>
     </a:lvl9pPr>
   </p:defaultTextStyle>
+  <p:extLst>
+    <p:ext uri="{EFAFB233-063F-42B5-8137-9DF3F51BA10A}">
+      <p15:sldGuideLst xmlns:p15="http://schemas.microsoft.com/office/powerpoint/2012/main">
+        <p15:guide id="1" orient="horz" pos="2160">
+          <p15:clr>
+            <a:srgbClr val="A4A3A4"/>
+          </p15:clr>
+        </p15:guide>
+        <p15:guide id="2" pos="2880">
+          <p15:clr>
+            <a:srgbClr val="A4A3A4"/>
+          </p15:clr>
+        </p15:guide>
+      </p15:sldGuideLst>
+    </p:ext>
+  </p:extLst>
 </p:presentation>
 </file>
 
 <file path=ppt/notesMasters/notesMaster1.xml><?xml version="1.0" encoding="utf-8"?>
-<p:notesMaster xmlns:a="http://schemas.openxmlformats.org/drawingml/2006/main" xmlns:p="http://schemas.openxmlformats.org/presentationml/2006/main" xmlns:r="http://schemas.openxmlformats.org/officeDocument/2006/relationships">
+<p:notesMaster xmlns:a="http://schemas.openxmlformats.org/drawingml/2006/main" xmlns:r="http://schemas.openxmlformats.org/officeDocument/2006/relationships" xmlns:p="http://schemas.openxmlformats.org/presentationml/2006/main">
   <p:cSld>
     <p:bg>
       <p:bgRef idx="1001">
@@ -141,241 +160,16 @@
           <a:chExt cx="0" cy="0"/>
         </a:xfrm>
       </p:grpSpPr>
-      <p:sp>
-        <p:nvSpPr>
-          <p:cNvPr id="2" name="Header Placeholder 1"/>
-          <p:cNvSpPr>
-            <a:spLocks noGrp="1"/>
-          </p:cNvSpPr>
-          <p:nvPr>
-            <p:ph type="hdr" sz="quarter"/>
-          </p:nvPr>
-        </p:nvSpPr>
-        <p:spPr>
-          <a:xfrm>
-            <a:off x="0" y="0"/>
-            <a:ext cx="2971800" cy="457200"/>
-          </a:xfrm>
-          <a:prstGeom prst="rect">
-            <a:avLst/>
-          </a:prstGeom>
-        </p:spPr>
-        <p:txBody>
-          <a:bodyPr vert="horz" lIns="91440" tIns="45720" rIns="91440" bIns="45720" rtlCol="0"/>
-          <a:lstStyle>
-            <a:lvl1pPr algn="l">
-              <a:defRPr sz="1200"/>
-            </a:lvl1pPr>
-          </a:lstStyle>
-          <a:p>
-            <a:endParaRPr lang="en-US"/>
-          </a:p>
-        </p:txBody>
-      </p:sp>
-      <p:sp>
-        <p:nvSpPr>
-          <p:cNvPr id="3" name="Date Placeholder 2"/>
-          <p:cNvSpPr>
-            <a:spLocks noGrp="1"/>
-          </p:cNvSpPr>
-          <p:nvPr>
-            <p:ph type="dt" idx="1"/>
-          </p:nvPr>
-        </p:nvSpPr>
-        <p:spPr>
-          <a:xfrm>
-            <a:off x="3884613" y="0"/>
-            <a:ext cx="2971800" cy="457200"/>
-          </a:xfrm>
-          <a:prstGeom prst="rect">
-            <a:avLst/>
-          </a:prstGeom>
-        </p:spPr>
-        <p:txBody>
-          <a:bodyPr vert="horz" lIns="91440" tIns="45720" rIns="91440" bIns="45720" rtlCol="0"/>
-          <a:lstStyle>
-            <a:lvl1pPr algn="r">
-              <a:defRPr sz="1200"/>
-            </a:lvl1pPr>
-          </a:lstStyle>
-          <a:p>
-            <a:fld id="{0F89C1C7-3DCD-1040-A9CF-14679D8B5DDD}" type="datetimeFigureOut">
-              <a:rPr lang="en-US" smtClean="0"/>
-              <a:t>10/17/16</a:t>
-            </a:fld>
-            <a:endParaRPr lang="en-US"/>
-          </a:p>
-        </p:txBody>
-      </p:sp>
-      <p:sp>
-        <p:nvSpPr>
-          <p:cNvPr id="4" name="Slide Image Placeholder 3"/>
-          <p:cNvSpPr>
-            <a:spLocks noGrp="1" noRot="1" noChangeAspect="1"/>
-          </p:cNvSpPr>
-          <p:nvPr>
-            <p:ph type="sldImg" idx="2"/>
-          </p:nvPr>
-        </p:nvSpPr>
-        <p:spPr>
-          <a:xfrm>
-            <a:off x="1143000" y="685800"/>
-            <a:ext cx="4572000" cy="3429000"/>
-          </a:xfrm>
-          <a:prstGeom prst="rect">
-            <a:avLst/>
-          </a:prstGeom>
-          <a:noFill/>
-          <a:ln w="12700">
-            <a:solidFill>
-              <a:prstClr val="black"/>
-            </a:solidFill>
-          </a:ln>
-        </p:spPr>
-        <p:txBody>
-          <a:bodyPr vert="horz" lIns="91440" tIns="45720" rIns="91440" bIns="45720" rtlCol="0" anchor="ctr"/>
-          <a:lstStyle/>
-          <a:p>
-            <a:endParaRPr lang="en-US"/>
-          </a:p>
-        </p:txBody>
-      </p:sp>
-      <p:sp>
-        <p:nvSpPr>
-          <p:cNvPr id="5" name="Notes Placeholder 4"/>
-          <p:cNvSpPr>
-            <a:spLocks noGrp="1"/>
-          </p:cNvSpPr>
-          <p:nvPr>
-            <p:ph type="body" sz="quarter" idx="3"/>
-          </p:nvPr>
-        </p:nvSpPr>
-        <p:spPr>
-          <a:xfrm>
-            <a:off x="685800" y="4343400"/>
-            <a:ext cx="5486400" cy="4114800"/>
-          </a:xfrm>
-          <a:prstGeom prst="rect">
-            <a:avLst/>
-          </a:prstGeom>
-        </p:spPr>
-        <p:txBody>
-          <a:bodyPr vert="horz" lIns="91440" tIns="45720" rIns="91440" bIns="45720" rtlCol="0"/>
-          <a:lstStyle/>
-          <a:p>
-            <a:pPr lvl="0"/>
-            <a:r>
-              <a:rPr lang="en-US" smtClean="0"/>
-              <a:t>Click to edit Master text styles</a:t>
-            </a:r>
-          </a:p>
-          <a:p>
-            <a:pPr lvl="1"/>
-            <a:r>
-              <a:rPr lang="en-US" smtClean="0"/>
-              <a:t>Second level</a:t>
-            </a:r>
-          </a:p>
-          <a:p>
-            <a:pPr lvl="2"/>
-            <a:r>
-              <a:rPr lang="en-US" smtClean="0"/>
-              <a:t>Third level</a:t>
-            </a:r>
-          </a:p>
-          <a:p>
-            <a:pPr lvl="3"/>
-            <a:r>
-              <a:rPr lang="en-US" smtClean="0"/>
-              <a:t>Fourth level</a:t>
-            </a:r>
-          </a:p>
-          <a:p>
-            <a:pPr lvl="4"/>
-            <a:r>
-              <a:rPr lang="en-US" smtClean="0"/>
-              <a:t>Fifth level</a:t>
-            </a:r>
-            <a:endParaRPr lang="en-US"/>
-          </a:p>
-        </p:txBody>
-      </p:sp>
-      <p:sp>
-        <p:nvSpPr>
-          <p:cNvPr id="6" name="Footer Placeholder 5"/>
-          <p:cNvSpPr>
-            <a:spLocks noGrp="1"/>
-          </p:cNvSpPr>
-          <p:nvPr>
-            <p:ph type="ftr" sz="quarter" idx="4"/>
-          </p:nvPr>
-        </p:nvSpPr>
-        <p:spPr>
-          <a:xfrm>
-            <a:off x="0" y="8685213"/>
-            <a:ext cx="2971800" cy="457200"/>
-          </a:xfrm>
-          <a:prstGeom prst="rect">
-            <a:avLst/>
-          </a:prstGeom>
-        </p:spPr>
-        <p:txBody>
-          <a:bodyPr vert="horz" lIns="91440" tIns="45720" rIns="91440" bIns="45720" rtlCol="0" anchor="b"/>
-          <a:lstStyle>
-            <a:lvl1pPr algn="l">
-              <a:defRPr sz="1200"/>
-            </a:lvl1pPr>
-          </a:lstStyle>
-          <a:p>
-            <a:endParaRPr lang="en-US"/>
-          </a:p>
-        </p:txBody>
-      </p:sp>
-      <p:sp>
-        <p:nvSpPr>
-          <p:cNvPr id="7" name="Slide Number Placeholder 6"/>
-          <p:cNvSpPr>
-            <a:spLocks noGrp="1"/>
-          </p:cNvSpPr>
-          <p:nvPr>
-            <p:ph type="sldNum" sz="quarter" idx="5"/>
-          </p:nvPr>
-        </p:nvSpPr>
-        <p:spPr>
-          <a:xfrm>
-            <a:off x="3884613" y="8685213"/>
-            <a:ext cx="2971800" cy="457200"/>
-          </a:xfrm>
-          <a:prstGeom prst="rect">
-            <a:avLst/>
-          </a:prstGeom>
-        </p:spPr>
-        <p:txBody>
-          <a:bodyPr vert="horz" lIns="91440" tIns="45720" rIns="91440" bIns="45720" rtlCol="0" anchor="b"/>
-          <a:lstStyle>
-            <a:lvl1pPr algn="r">
-              <a:defRPr sz="1200"/>
-            </a:lvl1pPr>
-          </a:lstStyle>
-          <a:p>
-            <a:fld id="{BB5E49A5-4136-284D-997B-48E1D791AD67}" type="slidenum">
-              <a:rPr lang="en-US" smtClean="0"/>
-              <a:t>‹#›</a:t>
-            </a:fld>
-            <a:endParaRPr lang="en-US"/>
-          </a:p>
-        </p:txBody>
-      </p:sp>
     </p:spTree>
     <p:extLst>
       <p:ext uri="{BB962C8B-B14F-4D97-AF65-F5344CB8AC3E}">
-        <p14:creationId xmlns:p14="http://schemas.microsoft.com/office/powerpoint/2010/main" val="2623252185"/>
+        <p14:creationId xmlns:p14="http://schemas.microsoft.com/office/powerpoint/2010/main" val="3149500062"/>
       </p:ext>
     </p:extLst>
   </p:cSld>
   <p:clrMap bg1="lt1" tx1="dk1" bg2="lt2" tx2="dk2" accent1="accent1" accent2="accent2" accent3="accent3" accent4="accent4" accent5="accent5" accent6="accent6" hlink="hlink" folHlink="folHlink"/>
   <p:notesStyle>
-    <a:lvl1pPr marL="0" algn="l" defTabSz="457200" rtl="0" eaLnBrk="1" latinLnBrk="0" hangingPunct="1">
+    <a:lvl1pPr marL="0" algn="l" defTabSz="914400" rtl="0" eaLnBrk="1" latinLnBrk="0" hangingPunct="1">
       <a:defRPr sz="1200" kern="1200">
         <a:solidFill>
           <a:schemeClr val="tx1"/>
@@ -385,7 +179,7 @@
         <a:cs typeface="+mn-cs"/>
       </a:defRPr>
     </a:lvl1pPr>
-    <a:lvl2pPr marL="457200" algn="l" defTabSz="457200" rtl="0" eaLnBrk="1" latinLnBrk="0" hangingPunct="1">
+    <a:lvl2pPr marL="457200" algn="l" defTabSz="914400" rtl="0" eaLnBrk="1" latinLnBrk="0" hangingPunct="1">
       <a:defRPr sz="1200" kern="1200">
         <a:solidFill>
           <a:schemeClr val="tx1"/>
@@ -395,7 +189,7 @@
         <a:cs typeface="+mn-cs"/>
       </a:defRPr>
     </a:lvl2pPr>
-    <a:lvl3pPr marL="914400" algn="l" defTabSz="457200" rtl="0" eaLnBrk="1" latinLnBrk="0" hangingPunct="1">
+    <a:lvl3pPr marL="914400" algn="l" defTabSz="914400" rtl="0" eaLnBrk="1" latinLnBrk="0" hangingPunct="1">
       <a:defRPr sz="1200" kern="1200">
         <a:solidFill>
           <a:schemeClr val="tx1"/>
@@ -405,7 +199,7 @@
         <a:cs typeface="+mn-cs"/>
       </a:defRPr>
     </a:lvl3pPr>
-    <a:lvl4pPr marL="1371600" algn="l" defTabSz="457200" rtl="0" eaLnBrk="1" latinLnBrk="0" hangingPunct="1">
+    <a:lvl4pPr marL="1371600" algn="l" defTabSz="914400" rtl="0" eaLnBrk="1" latinLnBrk="0" hangingPunct="1">
       <a:defRPr sz="1200" kern="1200">
         <a:solidFill>
           <a:schemeClr val="tx1"/>
@@ -415,7 +209,7 @@
         <a:cs typeface="+mn-cs"/>
       </a:defRPr>
     </a:lvl4pPr>
-    <a:lvl5pPr marL="1828800" algn="l" defTabSz="457200" rtl="0" eaLnBrk="1" latinLnBrk="0" hangingPunct="1">
+    <a:lvl5pPr marL="1828800" algn="l" defTabSz="914400" rtl="0" eaLnBrk="1" latinLnBrk="0" hangingPunct="1">
       <a:defRPr sz="1200" kern="1200">
         <a:solidFill>
           <a:schemeClr val="tx1"/>
@@ -425,7 +219,7 @@
         <a:cs typeface="+mn-cs"/>
       </a:defRPr>
     </a:lvl5pPr>
-    <a:lvl6pPr marL="2286000" algn="l" defTabSz="457200" rtl="0" eaLnBrk="1" latinLnBrk="0" hangingPunct="1">
+    <a:lvl6pPr marL="2286000" algn="l" defTabSz="914400" rtl="0" eaLnBrk="1" latinLnBrk="0" hangingPunct="1">
       <a:defRPr sz="1200" kern="1200">
         <a:solidFill>
           <a:schemeClr val="tx1"/>
@@ -435,7 +229,7 @@
         <a:cs typeface="+mn-cs"/>
       </a:defRPr>
     </a:lvl6pPr>
-    <a:lvl7pPr marL="2743200" algn="l" defTabSz="457200" rtl="0" eaLnBrk="1" latinLnBrk="0" hangingPunct="1">
+    <a:lvl7pPr marL="2743200" algn="l" defTabSz="914400" rtl="0" eaLnBrk="1" latinLnBrk="0" hangingPunct="1">
       <a:defRPr sz="1200" kern="1200">
         <a:solidFill>
           <a:schemeClr val="tx1"/>
@@ -445,7 +239,7 @@
         <a:cs typeface="+mn-cs"/>
       </a:defRPr>
     </a:lvl7pPr>
-    <a:lvl8pPr marL="3200400" algn="l" defTabSz="457200" rtl="0" eaLnBrk="1" latinLnBrk="0" hangingPunct="1">
+    <a:lvl8pPr marL="3200400" algn="l" defTabSz="914400" rtl="0" eaLnBrk="1" latinLnBrk="0" hangingPunct="1">
       <a:defRPr sz="1200" kern="1200">
         <a:solidFill>
           <a:schemeClr val="tx1"/>
@@ -455,7 +249,7 @@
         <a:cs typeface="+mn-cs"/>
       </a:defRPr>
     </a:lvl8pPr>
-    <a:lvl9pPr marL="3657600" algn="l" defTabSz="457200" rtl="0" eaLnBrk="1" latinLnBrk="0" hangingPunct="1">
+    <a:lvl9pPr marL="3657600" algn="l" defTabSz="914400" rtl="0" eaLnBrk="1" latinLnBrk="0" hangingPunct="1">
       <a:defRPr sz="1200" kern="1200">
         <a:solidFill>
           <a:schemeClr val="tx1"/>
@@ -470,7 +264,7 @@
 </file>
 
 <file path=ppt/notesSlides/notesSlide1.xml><?xml version="1.0" encoding="utf-8"?>
-<p:notes xmlns:a="http://schemas.openxmlformats.org/drawingml/2006/main" xmlns:p="http://schemas.openxmlformats.org/presentationml/2006/main" xmlns:r="http://schemas.openxmlformats.org/officeDocument/2006/relationships">
+<p:notes xmlns:a="http://schemas.openxmlformats.org/drawingml/2006/main" xmlns:r="http://schemas.openxmlformats.org/officeDocument/2006/relationships" xmlns:p="http://schemas.openxmlformats.org/presentationml/2006/main">
   <p:cSld>
     <p:spTree>
       <p:nvGrpSpPr>
@@ -490,7 +284,7 @@
         <p:nvSpPr>
           <p:cNvPr id="2" name="Slide Image Placeholder 1"/>
           <p:cNvSpPr>
-            <a:spLocks noGrp="1"/>
+            <a:spLocks noGrp="1" noRot="1" noChangeAspect="1"/>
           </p:cNvSpPr>
           <p:nvPr>
             <p:ph type="sldImg" idx="2"/>
@@ -505,7 +299,7 @@
             <a:spLocks noGrp="1"/>
           </p:cNvSpPr>
           <p:nvPr>
-            <p:ph type="body" idx="3" sz="quarter"/>
+            <p:ph type="body" sz="quarter" idx="3"/>
           </p:nvPr>
         </p:nvSpPr>
         <p:spPr/>
@@ -526,7 +320,7 @@
             <a:spLocks noGrp="1"/>
           </p:cNvSpPr>
           <p:nvPr>
-            <p:ph type="sldNum" idx="5" sz="quarter"/>
+            <p:ph type="sldNum" sz="quarter" idx="5"/>
           </p:nvPr>
         </p:nvSpPr>
         <p:spPr/>
@@ -540,7 +334,7 @@
 </file>
 
 <file path=ppt/notesSlides/notesSlide10.xml><?xml version="1.0" encoding="utf-8"?>
-<p:notes xmlns:a="http://schemas.openxmlformats.org/drawingml/2006/main" xmlns:p="http://schemas.openxmlformats.org/presentationml/2006/main" xmlns:r="http://schemas.openxmlformats.org/officeDocument/2006/relationships">
+<p:notes xmlns:a="http://schemas.openxmlformats.org/drawingml/2006/main" xmlns:r="http://schemas.openxmlformats.org/officeDocument/2006/relationships" xmlns:p="http://schemas.openxmlformats.org/presentationml/2006/main">
   <p:cSld>
     <p:spTree>
       <p:nvGrpSpPr>
@@ -560,7 +354,7 @@
         <p:nvSpPr>
           <p:cNvPr id="2" name="Slide Image Placeholder 1"/>
           <p:cNvSpPr>
-            <a:spLocks noGrp="1"/>
+            <a:spLocks noGrp="1" noRot="1" noChangeAspect="1"/>
           </p:cNvSpPr>
           <p:nvPr>
             <p:ph type="sldImg" idx="2"/>
@@ -575,7 +369,7 @@
             <a:spLocks noGrp="1"/>
           </p:cNvSpPr>
           <p:nvPr>
-            <p:ph type="body" idx="3" sz="quarter"/>
+            <p:ph type="body" sz="quarter" idx="3"/>
           </p:nvPr>
         </p:nvSpPr>
         <p:spPr/>
@@ -596,7 +390,7 @@
             <a:spLocks noGrp="1"/>
           </p:cNvSpPr>
           <p:nvPr>
-            <p:ph type="sldNum" idx="5" sz="quarter"/>
+            <p:ph type="sldNum" sz="quarter" idx="5"/>
           </p:nvPr>
         </p:nvSpPr>
         <p:spPr/>
@@ -610,7 +404,7 @@
 </file>
 
 <file path=ppt/notesSlides/notesSlide11.xml><?xml version="1.0" encoding="utf-8"?>
-<p:notes xmlns:a="http://schemas.openxmlformats.org/drawingml/2006/main" xmlns:p="http://schemas.openxmlformats.org/presentationml/2006/main" xmlns:r="http://schemas.openxmlformats.org/officeDocument/2006/relationships">
+<p:notes xmlns:a="http://schemas.openxmlformats.org/drawingml/2006/main" xmlns:r="http://schemas.openxmlformats.org/officeDocument/2006/relationships" xmlns:p="http://schemas.openxmlformats.org/presentationml/2006/main">
   <p:cSld>
     <p:spTree>
       <p:nvGrpSpPr>
@@ -630,7 +424,7 @@
         <p:nvSpPr>
           <p:cNvPr id="2" name="Slide Image Placeholder 1"/>
           <p:cNvSpPr>
-            <a:spLocks noGrp="1"/>
+            <a:spLocks noGrp="1" noRot="1" noChangeAspect="1"/>
           </p:cNvSpPr>
           <p:nvPr>
             <p:ph type="sldImg" idx="2"/>
@@ -645,7 +439,7 @@
             <a:spLocks noGrp="1"/>
           </p:cNvSpPr>
           <p:nvPr>
-            <p:ph type="body" idx="3" sz="quarter"/>
+            <p:ph type="body" sz="quarter" idx="3"/>
           </p:nvPr>
         </p:nvSpPr>
         <p:spPr/>
@@ -666,7 +460,7 @@
             <a:spLocks noGrp="1"/>
           </p:cNvSpPr>
           <p:nvPr>
-            <p:ph type="sldNum" idx="5" sz="quarter"/>
+            <p:ph type="sldNum" sz="quarter" idx="5"/>
           </p:nvPr>
         </p:nvSpPr>
         <p:spPr/>
@@ -680,7 +474,7 @@
 </file>
 
 <file path=ppt/notesSlides/notesSlide12.xml><?xml version="1.0" encoding="utf-8"?>
-<p:notes xmlns:a="http://schemas.openxmlformats.org/drawingml/2006/main" xmlns:p="http://schemas.openxmlformats.org/presentationml/2006/main" xmlns:r="http://schemas.openxmlformats.org/officeDocument/2006/relationships">
+<p:notes xmlns:a="http://schemas.openxmlformats.org/drawingml/2006/main" xmlns:r="http://schemas.openxmlformats.org/officeDocument/2006/relationships" xmlns:p="http://schemas.openxmlformats.org/presentationml/2006/main">
   <p:cSld>
     <p:spTree>
       <p:nvGrpSpPr>
@@ -700,7 +494,7 @@
         <p:nvSpPr>
           <p:cNvPr id="2" name="Slide Image Placeholder 1"/>
           <p:cNvSpPr>
-            <a:spLocks noGrp="1"/>
+            <a:spLocks noGrp="1" noRot="1" noChangeAspect="1"/>
           </p:cNvSpPr>
           <p:nvPr>
             <p:ph type="sldImg" idx="2"/>
@@ -715,7 +509,7 @@
             <a:spLocks noGrp="1"/>
           </p:cNvSpPr>
           <p:nvPr>
-            <p:ph type="body" idx="3" sz="quarter"/>
+            <p:ph type="body" sz="quarter" idx="3"/>
           </p:nvPr>
         </p:nvSpPr>
         <p:spPr/>
@@ -736,7 +530,7 @@
             <a:spLocks noGrp="1"/>
           </p:cNvSpPr>
           <p:nvPr>
-            <p:ph type="sldNum" idx="5" sz="quarter"/>
+            <p:ph type="sldNum" sz="quarter" idx="5"/>
           </p:nvPr>
         </p:nvSpPr>
         <p:spPr/>
@@ -750,7 +544,7 @@
 </file>
 
 <file path=ppt/notesSlides/notesSlide13.xml><?xml version="1.0" encoding="utf-8"?>
-<p:notes xmlns:a="http://schemas.openxmlformats.org/drawingml/2006/main" xmlns:p="http://schemas.openxmlformats.org/presentationml/2006/main" xmlns:r="http://schemas.openxmlformats.org/officeDocument/2006/relationships">
+<p:notes xmlns:a="http://schemas.openxmlformats.org/drawingml/2006/main" xmlns:r="http://schemas.openxmlformats.org/officeDocument/2006/relationships" xmlns:p="http://schemas.openxmlformats.org/presentationml/2006/main">
   <p:cSld>
     <p:spTree>
       <p:nvGrpSpPr>
@@ -770,7 +564,7 @@
         <p:nvSpPr>
           <p:cNvPr id="2" name="Slide Image Placeholder 1"/>
           <p:cNvSpPr>
-            <a:spLocks noGrp="1"/>
+            <a:spLocks noGrp="1" noRot="1" noChangeAspect="1"/>
           </p:cNvSpPr>
           <p:nvPr>
             <p:ph type="sldImg" idx="2"/>
@@ -785,7 +579,7 @@
             <a:spLocks noGrp="1"/>
           </p:cNvSpPr>
           <p:nvPr>
-            <p:ph type="body" idx="3" sz="quarter"/>
+            <p:ph type="body" sz="quarter" idx="3"/>
           </p:nvPr>
         </p:nvSpPr>
         <p:spPr/>
@@ -806,7 +600,7 @@
             <a:spLocks noGrp="1"/>
           </p:cNvSpPr>
           <p:nvPr>
-            <p:ph type="sldNum" idx="5" sz="quarter"/>
+            <p:ph type="sldNum" sz="quarter" idx="5"/>
           </p:nvPr>
         </p:nvSpPr>
         <p:spPr/>
@@ -820,7 +614,7 @@
 </file>
 
 <file path=ppt/notesSlides/notesSlide2.xml><?xml version="1.0" encoding="utf-8"?>
-<p:notes xmlns:a="http://schemas.openxmlformats.org/drawingml/2006/main" xmlns:p="http://schemas.openxmlformats.org/presentationml/2006/main" xmlns:r="http://schemas.openxmlformats.org/officeDocument/2006/relationships">
+<p:notes xmlns:a="http://schemas.openxmlformats.org/drawingml/2006/main" xmlns:r="http://schemas.openxmlformats.org/officeDocument/2006/relationships" xmlns:p="http://schemas.openxmlformats.org/presentationml/2006/main">
   <p:cSld>
     <p:spTree>
       <p:nvGrpSpPr>
@@ -840,7 +634,7 @@
         <p:nvSpPr>
           <p:cNvPr id="2" name="Slide Image Placeholder 1"/>
           <p:cNvSpPr>
-            <a:spLocks noGrp="1"/>
+            <a:spLocks noGrp="1" noRot="1" noChangeAspect="1"/>
           </p:cNvSpPr>
           <p:nvPr>
             <p:ph type="sldImg" idx="2"/>
@@ -855,7 +649,7 @@
             <a:spLocks noGrp="1"/>
           </p:cNvSpPr>
           <p:nvPr>
-            <p:ph type="body" idx="3" sz="quarter"/>
+            <p:ph type="body" sz="quarter" idx="3"/>
           </p:nvPr>
         </p:nvSpPr>
         <p:spPr/>
@@ -876,7 +670,7 @@
             <a:spLocks noGrp="1"/>
           </p:cNvSpPr>
           <p:nvPr>
-            <p:ph type="sldNum" idx="5" sz="quarter"/>
+            <p:ph type="sldNum" sz="quarter" idx="5"/>
           </p:nvPr>
         </p:nvSpPr>
         <p:spPr/>
@@ -890,7 +684,7 @@
 </file>
 
 <file path=ppt/notesSlides/notesSlide3.xml><?xml version="1.0" encoding="utf-8"?>
-<p:notes xmlns:a="http://schemas.openxmlformats.org/drawingml/2006/main" xmlns:p="http://schemas.openxmlformats.org/presentationml/2006/main" xmlns:r="http://schemas.openxmlformats.org/officeDocument/2006/relationships">
+<p:notes xmlns:a="http://schemas.openxmlformats.org/drawingml/2006/main" xmlns:r="http://schemas.openxmlformats.org/officeDocument/2006/relationships" xmlns:p="http://schemas.openxmlformats.org/presentationml/2006/main">
   <p:cSld>
     <p:spTree>
       <p:nvGrpSpPr>
@@ -910,7 +704,7 @@
         <p:nvSpPr>
           <p:cNvPr id="2" name="Slide Image Placeholder 1"/>
           <p:cNvSpPr>
-            <a:spLocks noGrp="1"/>
+            <a:spLocks noGrp="1" noRot="1" noChangeAspect="1"/>
           </p:cNvSpPr>
           <p:nvPr>
             <p:ph type="sldImg" idx="2"/>
@@ -925,7 +719,7 @@
             <a:spLocks noGrp="1"/>
           </p:cNvSpPr>
           <p:nvPr>
-            <p:ph type="body" idx="3" sz="quarter"/>
+            <p:ph type="body" sz="quarter" idx="3"/>
           </p:nvPr>
         </p:nvSpPr>
         <p:spPr/>
@@ -946,7 +740,7 @@
             <a:spLocks noGrp="1"/>
           </p:cNvSpPr>
           <p:nvPr>
-            <p:ph type="sldNum" idx="5" sz="quarter"/>
+            <p:ph type="sldNum" sz="quarter" idx="5"/>
           </p:nvPr>
         </p:nvSpPr>
         <p:spPr/>
@@ -960,7 +754,7 @@
 </file>
 
 <file path=ppt/notesSlides/notesSlide4.xml><?xml version="1.0" encoding="utf-8"?>
-<p:notes xmlns:a="http://schemas.openxmlformats.org/drawingml/2006/main" xmlns:p="http://schemas.openxmlformats.org/presentationml/2006/main" xmlns:r="http://schemas.openxmlformats.org/officeDocument/2006/relationships">
+<p:notes xmlns:a="http://schemas.openxmlformats.org/drawingml/2006/main" xmlns:r="http://schemas.openxmlformats.org/officeDocument/2006/relationships" xmlns:p="http://schemas.openxmlformats.org/presentationml/2006/main">
   <p:cSld>
     <p:spTree>
       <p:nvGrpSpPr>
@@ -980,7 +774,7 @@
         <p:nvSpPr>
           <p:cNvPr id="2" name="Slide Image Placeholder 1"/>
           <p:cNvSpPr>
-            <a:spLocks noGrp="1"/>
+            <a:spLocks noGrp="1" noRot="1" noChangeAspect="1"/>
           </p:cNvSpPr>
           <p:nvPr>
             <p:ph type="sldImg" idx="2"/>
@@ -995,7 +789,7 @@
             <a:spLocks noGrp="1"/>
           </p:cNvSpPr>
           <p:nvPr>
-            <p:ph type="body" idx="3" sz="quarter"/>
+            <p:ph type="body" sz="quarter" idx="3"/>
           </p:nvPr>
         </p:nvSpPr>
         <p:spPr/>
@@ -1016,7 +810,7 @@
             <a:spLocks noGrp="1"/>
           </p:cNvSpPr>
           <p:nvPr>
-            <p:ph type="sldNum" idx="5" sz="quarter"/>
+            <p:ph type="sldNum" sz="quarter" idx="5"/>
           </p:nvPr>
         </p:nvSpPr>
         <p:spPr/>
@@ -1030,7 +824,7 @@
 </file>
 
 <file path=ppt/notesSlides/notesSlide5.xml><?xml version="1.0" encoding="utf-8"?>
-<p:notes xmlns:a="http://schemas.openxmlformats.org/drawingml/2006/main" xmlns:p="http://schemas.openxmlformats.org/presentationml/2006/main" xmlns:r="http://schemas.openxmlformats.org/officeDocument/2006/relationships">
+<p:notes xmlns:a="http://schemas.openxmlformats.org/drawingml/2006/main" xmlns:r="http://schemas.openxmlformats.org/officeDocument/2006/relationships" xmlns:p="http://schemas.openxmlformats.org/presentationml/2006/main">
   <p:cSld>
     <p:spTree>
       <p:nvGrpSpPr>
@@ -1050,7 +844,7 @@
         <p:nvSpPr>
           <p:cNvPr id="2" name="Slide Image Placeholder 1"/>
           <p:cNvSpPr>
-            <a:spLocks noGrp="1"/>
+            <a:spLocks noGrp="1" noRot="1" noChangeAspect="1"/>
           </p:cNvSpPr>
           <p:nvPr>
             <p:ph type="sldImg" idx="2"/>
@@ -1065,7 +859,7 @@
             <a:spLocks noGrp="1"/>
           </p:cNvSpPr>
           <p:nvPr>
-            <p:ph type="body" idx="3" sz="quarter"/>
+            <p:ph type="body" sz="quarter" idx="3"/>
           </p:nvPr>
         </p:nvSpPr>
         <p:spPr/>
@@ -1086,7 +880,7 @@
             <a:spLocks noGrp="1"/>
           </p:cNvSpPr>
           <p:nvPr>
-            <p:ph type="sldNum" idx="5" sz="quarter"/>
+            <p:ph type="sldNum" sz="quarter" idx="5"/>
           </p:nvPr>
         </p:nvSpPr>
         <p:spPr/>
@@ -1100,7 +894,7 @@
 </file>
 
 <file path=ppt/notesSlides/notesSlide6.xml><?xml version="1.0" encoding="utf-8"?>
-<p:notes xmlns:a="http://schemas.openxmlformats.org/drawingml/2006/main" xmlns:p="http://schemas.openxmlformats.org/presentationml/2006/main" xmlns:r="http://schemas.openxmlformats.org/officeDocument/2006/relationships">
+<p:notes xmlns:a="http://schemas.openxmlformats.org/drawingml/2006/main" xmlns:r="http://schemas.openxmlformats.org/officeDocument/2006/relationships" xmlns:p="http://schemas.openxmlformats.org/presentationml/2006/main">
   <p:cSld>
     <p:spTree>
       <p:nvGrpSpPr>
@@ -1120,7 +914,7 @@
         <p:nvSpPr>
           <p:cNvPr id="2" name="Slide Image Placeholder 1"/>
           <p:cNvSpPr>
-            <a:spLocks noGrp="1"/>
+            <a:spLocks noGrp="1" noRot="1" noChangeAspect="1"/>
           </p:cNvSpPr>
           <p:nvPr>
             <p:ph type="sldImg" idx="2"/>
@@ -1135,7 +929,7 @@
             <a:spLocks noGrp="1"/>
           </p:cNvSpPr>
           <p:nvPr>
-            <p:ph type="body" idx="3" sz="quarter"/>
+            <p:ph type="body" sz="quarter" idx="3"/>
           </p:nvPr>
         </p:nvSpPr>
         <p:spPr/>
@@ -1156,7 +950,7 @@
             <a:spLocks noGrp="1"/>
           </p:cNvSpPr>
           <p:nvPr>
-            <p:ph type="sldNum" idx="5" sz="quarter"/>
+            <p:ph type="sldNum" sz="quarter" idx="5"/>
           </p:nvPr>
         </p:nvSpPr>
         <p:spPr/>
@@ -1170,7 +964,7 @@
 </file>
 
 <file path=ppt/notesSlides/notesSlide7.xml><?xml version="1.0" encoding="utf-8"?>
-<p:notes xmlns:a="http://schemas.openxmlformats.org/drawingml/2006/main" xmlns:p="http://schemas.openxmlformats.org/presentationml/2006/main" xmlns:r="http://schemas.openxmlformats.org/officeDocument/2006/relationships">
+<p:notes xmlns:a="http://schemas.openxmlformats.org/drawingml/2006/main" xmlns:r="http://schemas.openxmlformats.org/officeDocument/2006/relationships" xmlns:p="http://schemas.openxmlformats.org/presentationml/2006/main">
   <p:cSld>
     <p:spTree>
       <p:nvGrpSpPr>
@@ -1190,7 +984,7 @@
         <p:nvSpPr>
           <p:cNvPr id="2" name="Slide Image Placeholder 1"/>
           <p:cNvSpPr>
-            <a:spLocks noGrp="1"/>
+            <a:spLocks noGrp="1" noRot="1" noChangeAspect="1"/>
           </p:cNvSpPr>
           <p:nvPr>
             <p:ph type="sldImg" idx="2"/>
@@ -1205,7 +999,7 @@
             <a:spLocks noGrp="1"/>
           </p:cNvSpPr>
           <p:nvPr>
-            <p:ph type="body" idx="3" sz="quarter"/>
+            <p:ph type="body" sz="quarter" idx="3"/>
           </p:nvPr>
         </p:nvSpPr>
         <p:spPr/>
@@ -1226,7 +1020,7 @@
             <a:spLocks noGrp="1"/>
           </p:cNvSpPr>
           <p:nvPr>
-            <p:ph type="sldNum" idx="5" sz="quarter"/>
+            <p:ph type="sldNum" sz="quarter" idx="5"/>
           </p:nvPr>
         </p:nvSpPr>
         <p:spPr/>
@@ -1240,7 +1034,7 @@
 </file>
 
 <file path=ppt/notesSlides/notesSlide8.xml><?xml version="1.0" encoding="utf-8"?>
-<p:notes xmlns:a="http://schemas.openxmlformats.org/drawingml/2006/main" xmlns:p="http://schemas.openxmlformats.org/presentationml/2006/main" xmlns:r="http://schemas.openxmlformats.org/officeDocument/2006/relationships">
+<p:notes xmlns:a="http://schemas.openxmlformats.org/drawingml/2006/main" xmlns:r="http://schemas.openxmlformats.org/officeDocument/2006/relationships" xmlns:p="http://schemas.openxmlformats.org/presentationml/2006/main">
   <p:cSld>
     <p:spTree>
       <p:nvGrpSpPr>
@@ -1260,7 +1054,7 @@
         <p:nvSpPr>
           <p:cNvPr id="2" name="Slide Image Placeholder 1"/>
           <p:cNvSpPr>
-            <a:spLocks noGrp="1"/>
+            <a:spLocks noGrp="1" noRot="1" noChangeAspect="1"/>
           </p:cNvSpPr>
           <p:nvPr>
             <p:ph type="sldImg" idx="2"/>
@@ -1275,7 +1069,7 @@
             <a:spLocks noGrp="1"/>
           </p:cNvSpPr>
           <p:nvPr>
-            <p:ph type="body" idx="3" sz="quarter"/>
+            <p:ph type="body" sz="quarter" idx="3"/>
           </p:nvPr>
         </p:nvSpPr>
         <p:spPr/>
@@ -1296,7 +1090,7 @@
             <a:spLocks noGrp="1"/>
           </p:cNvSpPr>
           <p:nvPr>
-            <p:ph type="sldNum" idx="5" sz="quarter"/>
+            <p:ph type="sldNum" sz="quarter" idx="5"/>
           </p:nvPr>
         </p:nvSpPr>
         <p:spPr/>
@@ -1310,7 +1104,7 @@
 </file>
 
 <file path=ppt/notesSlides/notesSlide9.xml><?xml version="1.0" encoding="utf-8"?>
-<p:notes xmlns:a="http://schemas.openxmlformats.org/drawingml/2006/main" xmlns:p="http://schemas.openxmlformats.org/presentationml/2006/main" xmlns:r="http://schemas.openxmlformats.org/officeDocument/2006/relationships">
+<p:notes xmlns:a="http://schemas.openxmlformats.org/drawingml/2006/main" xmlns:r="http://schemas.openxmlformats.org/officeDocument/2006/relationships" xmlns:p="http://schemas.openxmlformats.org/presentationml/2006/main">
   <p:cSld>
     <p:spTree>
       <p:nvGrpSpPr>
@@ -1330,7 +1124,7 @@
         <p:nvSpPr>
           <p:cNvPr id="2" name="Slide Image Placeholder 1"/>
           <p:cNvSpPr>
-            <a:spLocks noGrp="1"/>
+            <a:spLocks noGrp="1" noRot="1" noChangeAspect="1"/>
           </p:cNvSpPr>
           <p:nvPr>
             <p:ph type="sldImg" idx="2"/>
@@ -1345,7 +1139,7 @@
             <a:spLocks noGrp="1"/>
           </p:cNvSpPr>
           <p:nvPr>
-            <p:ph type="body" idx="3" sz="quarter"/>
+            <p:ph type="body" sz="quarter" idx="3"/>
           </p:nvPr>
         </p:nvSpPr>
         <p:spPr/>
@@ -1366,7 +1160,7 @@
             <a:spLocks noGrp="1"/>
           </p:cNvSpPr>
           <p:nvPr>
-            <p:ph type="sldNum" idx="5" sz="quarter"/>
+            <p:ph type="sldNum" sz="quarter" idx="5"/>
           </p:nvPr>
         </p:nvSpPr>
         <p:spPr/>
@@ -1417,10 +1211,9 @@
           <a:lstStyle/>
           <a:p>
             <a:r>
-              <a:rPr lang="en-US" smtClean="0"/>
+              <a:rPr lang="en-US"/>
               <a:t>Click to edit Master title style</a:t>
             </a:r>
-            <a:endParaRPr lang="en-US"/>
           </a:p>
         </p:txBody>
       </p:sp>
@@ -1536,10 +1329,9 @@
           </a:lstStyle>
           <a:p>
             <a:r>
-              <a:rPr lang="en-US" smtClean="0"/>
+              <a:rPr lang="en-US"/>
               <a:t>Click to edit Master subtitle style</a:t>
             </a:r>
-            <a:endParaRPr lang="en-US"/>
           </a:p>
         </p:txBody>
       </p:sp>
@@ -1560,7 +1352,7 @@
           <a:p>
             <a:fld id="{5BCAD085-E8A6-8845-BD4E-CB4CCA059FC4}" type="datetimeFigureOut">
               <a:rPr lang="en-US" smtClean="0"/>
-              <a:t>1/27/13</a:t>
+              <a:t>10/20/2026</a:t>
             </a:fld>
             <a:endParaRPr lang="en-US"/>
           </a:p>
@@ -1654,10 +1446,9 @@
           <a:lstStyle/>
           <a:p>
             <a:r>
-              <a:rPr lang="en-US" smtClean="0"/>
+              <a:rPr lang="en-US"/>
               <a:t>Click to edit Master title style</a:t>
             </a:r>
-            <a:endParaRPr lang="en-US"/>
           </a:p>
         </p:txBody>
       </p:sp>
@@ -1678,38 +1469,37 @@
           <a:p>
             <a:pPr lvl="0"/>
             <a:r>
-              <a:rPr lang="en-US" smtClean="0"/>
+              <a:rPr lang="en-US"/>
               <a:t>Click to edit Master text styles</a:t>
             </a:r>
           </a:p>
           <a:p>
             <a:pPr lvl="1"/>
             <a:r>
-              <a:rPr lang="en-US" smtClean="0"/>
+              <a:rPr lang="en-US"/>
               <a:t>Second level</a:t>
             </a:r>
           </a:p>
           <a:p>
             <a:pPr lvl="2"/>
             <a:r>
-              <a:rPr lang="en-US" smtClean="0"/>
+              <a:rPr lang="en-US"/>
               <a:t>Third level</a:t>
             </a:r>
           </a:p>
           <a:p>
             <a:pPr lvl="3"/>
             <a:r>
-              <a:rPr lang="en-US" smtClean="0"/>
+              <a:rPr lang="en-US"/>
               <a:t>Fourth level</a:t>
             </a:r>
           </a:p>
           <a:p>
             <a:pPr lvl="4"/>
             <a:r>
-              <a:rPr lang="en-US" smtClean="0"/>
+              <a:rPr lang="en-US"/>
               <a:t>Fifth level</a:t>
             </a:r>
-            <a:endParaRPr lang="en-US"/>
           </a:p>
         </p:txBody>
       </p:sp>
@@ -1730,7 +1520,7 @@
           <a:p>
             <a:fld id="{5BCAD085-E8A6-8845-BD4E-CB4CCA059FC4}" type="datetimeFigureOut">
               <a:rPr lang="en-US" smtClean="0"/>
-              <a:t>1/27/13</a:t>
+              <a:t>10/20/2026</a:t>
             </a:fld>
             <a:endParaRPr lang="en-US"/>
           </a:p>
@@ -1829,10 +1619,9 @@
           <a:lstStyle/>
           <a:p>
             <a:r>
-              <a:rPr lang="en-US" smtClean="0"/>
+              <a:rPr lang="en-US"/>
               <a:t>Click to edit Master title style</a:t>
             </a:r>
-            <a:endParaRPr lang="en-US"/>
           </a:p>
         </p:txBody>
       </p:sp>
@@ -1858,38 +1647,37 @@
           <a:p>
             <a:pPr lvl="0"/>
             <a:r>
-              <a:rPr lang="en-US" smtClean="0"/>
+              <a:rPr lang="en-US"/>
               <a:t>Click to edit Master text styles</a:t>
             </a:r>
           </a:p>
           <a:p>
             <a:pPr lvl="1"/>
             <a:r>
-              <a:rPr lang="en-US" smtClean="0"/>
+              <a:rPr lang="en-US"/>
               <a:t>Second level</a:t>
             </a:r>
           </a:p>
           <a:p>
             <a:pPr lvl="2"/>
             <a:r>
-              <a:rPr lang="en-US" smtClean="0"/>
+              <a:rPr lang="en-US"/>
               <a:t>Third level</a:t>
             </a:r>
           </a:p>
           <a:p>
             <a:pPr lvl="3"/>
             <a:r>
-              <a:rPr lang="en-US" smtClean="0"/>
+              <a:rPr lang="en-US"/>
               <a:t>Fourth level</a:t>
             </a:r>
           </a:p>
           <a:p>
             <a:pPr lvl="4"/>
             <a:r>
-              <a:rPr lang="en-US" smtClean="0"/>
+              <a:rPr lang="en-US"/>
               <a:t>Fifth level</a:t>
             </a:r>
-            <a:endParaRPr lang="en-US"/>
           </a:p>
         </p:txBody>
       </p:sp>
@@ -1910,7 +1698,7 @@
           <a:p>
             <a:fld id="{5BCAD085-E8A6-8845-BD4E-CB4CCA059FC4}" type="datetimeFigureOut">
               <a:rPr lang="en-US" smtClean="0"/>
-              <a:t>1/27/13</a:t>
+              <a:t>10/20/2026</a:t>
             </a:fld>
             <a:endParaRPr lang="en-US"/>
           </a:p>
@@ -2004,10 +1792,9 @@
           <a:lstStyle/>
           <a:p>
             <a:r>
-              <a:rPr lang="en-US" smtClean="0"/>
+              <a:rPr lang="en-US"/>
               <a:t>Click to edit Master title style</a:t>
             </a:r>
-            <a:endParaRPr lang="en-US"/>
           </a:p>
         </p:txBody>
       </p:sp>
@@ -2028,38 +1815,37 @@
           <a:p>
             <a:pPr lvl="0"/>
             <a:r>
-              <a:rPr lang="en-US" smtClean="0"/>
+              <a:rPr lang="en-US"/>
               <a:t>Click to edit Master text styles</a:t>
             </a:r>
           </a:p>
           <a:p>
             <a:pPr lvl="1"/>
             <a:r>
-              <a:rPr lang="en-US" smtClean="0"/>
+              <a:rPr lang="en-US"/>
               <a:t>Second level</a:t>
             </a:r>
           </a:p>
           <a:p>
             <a:pPr lvl="2"/>
             <a:r>
-              <a:rPr lang="en-US" smtClean="0"/>
+              <a:rPr lang="en-US"/>
               <a:t>Third level</a:t>
             </a:r>
           </a:p>
           <a:p>
             <a:pPr lvl="3"/>
             <a:r>
-              <a:rPr lang="en-US" smtClean="0"/>
+              <a:rPr lang="en-US"/>
               <a:t>Fourth level</a:t>
             </a:r>
           </a:p>
           <a:p>
             <a:pPr lvl="4"/>
             <a:r>
-              <a:rPr lang="en-US" smtClean="0"/>
+              <a:rPr lang="en-US"/>
               <a:t>Fifth level</a:t>
             </a:r>
-            <a:endParaRPr lang="en-US"/>
           </a:p>
         </p:txBody>
       </p:sp>
@@ -2080,7 +1866,7 @@
           <a:p>
             <a:fld id="{5BCAD085-E8A6-8845-BD4E-CB4CCA059FC4}" type="datetimeFigureOut">
               <a:rPr lang="en-US" smtClean="0"/>
-              <a:t>1/27/13</a:t>
+              <a:t>10/20/2026</a:t>
             </a:fld>
             <a:endParaRPr lang="en-US"/>
           </a:p>
@@ -2183,10 +1969,9 @@
           </a:lstStyle>
           <a:p>
             <a:r>
-              <a:rPr lang="en-US" smtClean="0"/>
+              <a:rPr lang="en-US"/>
               <a:t>Click to edit Master title style</a:t>
             </a:r>
-            <a:endParaRPr lang="en-US"/>
           </a:p>
         </p:txBody>
       </p:sp>
@@ -2303,7 +2088,7 @@
           <a:p>
             <a:pPr lvl="0"/>
             <a:r>
-              <a:rPr lang="en-US" smtClean="0"/>
+              <a:rPr lang="en-US"/>
               <a:t>Click to edit Master text styles</a:t>
             </a:r>
           </a:p>
@@ -2326,7 +2111,7 @@
           <a:p>
             <a:fld id="{5BCAD085-E8A6-8845-BD4E-CB4CCA059FC4}" type="datetimeFigureOut">
               <a:rPr lang="en-US" smtClean="0"/>
-              <a:t>1/27/13</a:t>
+              <a:t>10/20/2026</a:t>
             </a:fld>
             <a:endParaRPr lang="en-US"/>
           </a:p>
@@ -2420,10 +2205,9 @@
           <a:lstStyle/>
           <a:p>
             <a:r>
-              <a:rPr lang="en-US" smtClean="0"/>
+              <a:rPr lang="en-US"/>
               <a:t>Click to edit Master title style</a:t>
             </a:r>
-            <a:endParaRPr lang="en-US"/>
           </a:p>
         </p:txBody>
       </p:sp>
@@ -2477,38 +2261,37 @@
           <a:p>
             <a:pPr lvl="0"/>
             <a:r>
-              <a:rPr lang="en-US" smtClean="0"/>
+              <a:rPr lang="en-US"/>
               <a:t>Click to edit Master text styles</a:t>
             </a:r>
           </a:p>
           <a:p>
             <a:pPr lvl="1"/>
             <a:r>
-              <a:rPr lang="en-US" smtClean="0"/>
+              <a:rPr lang="en-US"/>
               <a:t>Second level</a:t>
             </a:r>
           </a:p>
           <a:p>
             <a:pPr lvl="2"/>
             <a:r>
-              <a:rPr lang="en-US" smtClean="0"/>
+              <a:rPr lang="en-US"/>
               <a:t>Third level</a:t>
             </a:r>
           </a:p>
           <a:p>
             <a:pPr lvl="3"/>
             <a:r>
-              <a:rPr lang="en-US" smtClean="0"/>
+              <a:rPr lang="en-US"/>
               <a:t>Fourth level</a:t>
             </a:r>
           </a:p>
           <a:p>
             <a:pPr lvl="4"/>
             <a:r>
-              <a:rPr lang="en-US" smtClean="0"/>
+              <a:rPr lang="en-US"/>
               <a:t>Fifth level</a:t>
             </a:r>
-            <a:endParaRPr lang="en-US"/>
           </a:p>
         </p:txBody>
       </p:sp>
@@ -2562,38 +2345,37 @@
           <a:p>
             <a:pPr lvl="0"/>
             <a:r>
-              <a:rPr lang="en-US" smtClean="0"/>
+              <a:rPr lang="en-US"/>
               <a:t>Click to edit Master text styles</a:t>
             </a:r>
           </a:p>
           <a:p>
             <a:pPr lvl="1"/>
             <a:r>
-              <a:rPr lang="en-US" smtClean="0"/>
+              <a:rPr lang="en-US"/>
               <a:t>Second level</a:t>
             </a:r>
           </a:p>
           <a:p>
             <a:pPr lvl="2"/>
             <a:r>
-              <a:rPr lang="en-US" smtClean="0"/>
+              <a:rPr lang="en-US"/>
               <a:t>Third level</a:t>
             </a:r>
           </a:p>
           <a:p>
             <a:pPr lvl="3"/>
             <a:r>
-              <a:rPr lang="en-US" smtClean="0"/>
+              <a:rPr lang="en-US"/>
               <a:t>Fourth level</a:t>
             </a:r>
           </a:p>
           <a:p>
             <a:pPr lvl="4"/>
             <a:r>
-              <a:rPr lang="en-US" smtClean="0"/>
+              <a:rPr lang="en-US"/>
               <a:t>Fifth level</a:t>
             </a:r>
-            <a:endParaRPr lang="en-US"/>
           </a:p>
         </p:txBody>
       </p:sp>
@@ -2614,7 +2396,7 @@
           <a:p>
             <a:fld id="{5BCAD085-E8A6-8845-BD4E-CB4CCA059FC4}" type="datetimeFigureOut">
               <a:rPr lang="en-US" smtClean="0"/>
-              <a:t>1/27/13</a:t>
+              <a:t>10/20/2026</a:t>
             </a:fld>
             <a:endParaRPr lang="en-US"/>
           </a:p>
@@ -2712,10 +2494,9 @@
           </a:lstStyle>
           <a:p>
             <a:r>
-              <a:rPr lang="en-US" smtClean="0"/>
+              <a:rPr lang="en-US"/>
               <a:t>Click to edit Master title style</a:t>
             </a:r>
-            <a:endParaRPr lang="en-US"/>
           </a:p>
         </p:txBody>
       </p:sp>
@@ -2778,7 +2559,7 @@
           <a:p>
             <a:pPr lvl="0"/>
             <a:r>
-              <a:rPr lang="en-US" smtClean="0"/>
+              <a:rPr lang="en-US"/>
               <a:t>Click to edit Master text styles</a:t>
             </a:r>
           </a:p>
@@ -2834,38 +2615,37 @@
           <a:p>
             <a:pPr lvl="0"/>
             <a:r>
-              <a:rPr lang="en-US" smtClean="0"/>
+              <a:rPr lang="en-US"/>
               <a:t>Click to edit Master text styles</a:t>
             </a:r>
           </a:p>
           <a:p>
             <a:pPr lvl="1"/>
             <a:r>
-              <a:rPr lang="en-US" smtClean="0"/>
+              <a:rPr lang="en-US"/>
               <a:t>Second level</a:t>
             </a:r>
           </a:p>
           <a:p>
             <a:pPr lvl="2"/>
             <a:r>
-              <a:rPr lang="en-US" smtClean="0"/>
+              <a:rPr lang="en-US"/>
               <a:t>Third level</a:t>
             </a:r>
           </a:p>
           <a:p>
             <a:pPr lvl="3"/>
             <a:r>
-              <a:rPr lang="en-US" smtClean="0"/>
+              <a:rPr lang="en-US"/>
               <a:t>Fourth level</a:t>
             </a:r>
           </a:p>
           <a:p>
             <a:pPr lvl="4"/>
             <a:r>
-              <a:rPr lang="en-US" smtClean="0"/>
+              <a:rPr lang="en-US"/>
               <a:t>Fifth level</a:t>
             </a:r>
-            <a:endParaRPr lang="en-US"/>
           </a:p>
         </p:txBody>
       </p:sp>
@@ -2928,7 +2708,7 @@
           <a:p>
             <a:pPr lvl="0"/>
             <a:r>
-              <a:rPr lang="en-US" smtClean="0"/>
+              <a:rPr lang="en-US"/>
               <a:t>Click to edit Master text styles</a:t>
             </a:r>
           </a:p>
@@ -2984,38 +2764,37 @@
           <a:p>
             <a:pPr lvl="0"/>
             <a:r>
-              <a:rPr lang="en-US" smtClean="0"/>
+              <a:rPr lang="en-US"/>
               <a:t>Click to edit Master text styles</a:t>
             </a:r>
           </a:p>
           <a:p>
             <a:pPr lvl="1"/>
             <a:r>
-              <a:rPr lang="en-US" smtClean="0"/>
+              <a:rPr lang="en-US"/>
               <a:t>Second level</a:t>
             </a:r>
           </a:p>
           <a:p>
             <a:pPr lvl="2"/>
             <a:r>
-              <a:rPr lang="en-US" smtClean="0"/>
+              <a:rPr lang="en-US"/>
               <a:t>Third level</a:t>
             </a:r>
           </a:p>
           <a:p>
             <a:pPr lvl="3"/>
             <a:r>
-              <a:rPr lang="en-US" smtClean="0"/>
+              <a:rPr lang="en-US"/>
               <a:t>Fourth level</a:t>
             </a:r>
           </a:p>
           <a:p>
             <a:pPr lvl="4"/>
             <a:r>
-              <a:rPr lang="en-US" smtClean="0"/>
+              <a:rPr lang="en-US"/>
               <a:t>Fifth level</a:t>
             </a:r>
-            <a:endParaRPr lang="en-US"/>
           </a:p>
         </p:txBody>
       </p:sp>
@@ -3036,7 +2815,7 @@
           <a:p>
             <a:fld id="{5BCAD085-E8A6-8845-BD4E-CB4CCA059FC4}" type="datetimeFigureOut">
               <a:rPr lang="en-US" smtClean="0"/>
-              <a:t>1/27/13</a:t>
+              <a:t>10/20/2026</a:t>
             </a:fld>
             <a:endParaRPr lang="en-US"/>
           </a:p>
@@ -3130,10 +2909,9 @@
           <a:lstStyle/>
           <a:p>
             <a:r>
-              <a:rPr lang="en-US" smtClean="0"/>
+              <a:rPr lang="en-US"/>
               <a:t>Click to edit Master title style</a:t>
             </a:r>
-            <a:endParaRPr lang="en-US"/>
           </a:p>
         </p:txBody>
       </p:sp>
@@ -3154,7 +2932,7 @@
           <a:p>
             <a:fld id="{5BCAD085-E8A6-8845-BD4E-CB4CCA059FC4}" type="datetimeFigureOut">
               <a:rPr lang="en-US" smtClean="0"/>
-              <a:t>1/27/13</a:t>
+              <a:t>10/20/2026</a:t>
             </a:fld>
             <a:endParaRPr lang="en-US"/>
           </a:p>
@@ -3249,7 +3027,7 @@
           <a:p>
             <a:fld id="{5BCAD085-E8A6-8845-BD4E-CB4CCA059FC4}" type="datetimeFigureOut">
               <a:rPr lang="en-US" smtClean="0"/>
-              <a:t>1/27/13</a:t>
+              <a:t>10/20/2026</a:t>
             </a:fld>
             <a:endParaRPr lang="en-US"/>
           </a:p>
@@ -3352,10 +3130,9 @@
           </a:lstStyle>
           <a:p>
             <a:r>
-              <a:rPr lang="en-US" smtClean="0"/>
+              <a:rPr lang="en-US"/>
               <a:t>Click to edit Master title style</a:t>
             </a:r>
-            <a:endParaRPr lang="en-US"/>
           </a:p>
         </p:txBody>
       </p:sp>
@@ -3409,38 +3186,37 @@
           <a:p>
             <a:pPr lvl="0"/>
             <a:r>
-              <a:rPr lang="en-US" smtClean="0"/>
+              <a:rPr lang="en-US"/>
               <a:t>Click to edit Master text styles</a:t>
             </a:r>
           </a:p>
           <a:p>
             <a:pPr lvl="1"/>
             <a:r>
-              <a:rPr lang="en-US" smtClean="0"/>
+              <a:rPr lang="en-US"/>
               <a:t>Second level</a:t>
             </a:r>
           </a:p>
           <a:p>
             <a:pPr lvl="2"/>
             <a:r>
-              <a:rPr lang="en-US" smtClean="0"/>
+              <a:rPr lang="en-US"/>
               <a:t>Third level</a:t>
             </a:r>
           </a:p>
           <a:p>
             <a:pPr lvl="3"/>
             <a:r>
-              <a:rPr lang="en-US" smtClean="0"/>
+              <a:rPr lang="en-US"/>
               <a:t>Fourth level</a:t>
             </a:r>
           </a:p>
           <a:p>
             <a:pPr lvl="4"/>
             <a:r>
-              <a:rPr lang="en-US" smtClean="0"/>
+              <a:rPr lang="en-US"/>
               <a:t>Fifth level</a:t>
             </a:r>
-            <a:endParaRPr lang="en-US"/>
           </a:p>
         </p:txBody>
       </p:sp>
@@ -3503,7 +3279,7 @@
           <a:p>
             <a:pPr lvl="0"/>
             <a:r>
-              <a:rPr lang="en-US" smtClean="0"/>
+              <a:rPr lang="en-US"/>
               <a:t>Click to edit Master text styles</a:t>
             </a:r>
           </a:p>
@@ -3526,7 +3302,7 @@
           <a:p>
             <a:fld id="{5BCAD085-E8A6-8845-BD4E-CB4CCA059FC4}" type="datetimeFigureOut">
               <a:rPr lang="en-US" smtClean="0"/>
-              <a:t>1/27/13</a:t>
+              <a:t>10/20/2026</a:t>
             </a:fld>
             <a:endParaRPr lang="en-US"/>
           </a:p>
@@ -3629,10 +3405,9 @@
           </a:lstStyle>
           <a:p>
             <a:r>
-              <a:rPr lang="en-US" smtClean="0"/>
+              <a:rPr lang="en-US"/>
               <a:t>Click to edit Master title style</a:t>
             </a:r>
-            <a:endParaRPr lang="en-US"/>
           </a:p>
         </p:txBody>
       </p:sp>
@@ -3756,7 +3531,7 @@
           <a:p>
             <a:pPr lvl="0"/>
             <a:r>
-              <a:rPr lang="en-US" smtClean="0"/>
+              <a:rPr lang="en-US"/>
               <a:t>Click to edit Master text styles</a:t>
             </a:r>
           </a:p>
@@ -3779,7 +3554,7 @@
           <a:p>
             <a:fld id="{5BCAD085-E8A6-8845-BD4E-CB4CCA059FC4}" type="datetimeFigureOut">
               <a:rPr lang="en-US" smtClean="0"/>
-              <a:t>1/27/13</a:t>
+              <a:t>10/20/2026</a:t>
             </a:fld>
             <a:endParaRPr lang="en-US"/>
           </a:p>
@@ -3888,10 +3663,9 @@
           <a:lstStyle/>
           <a:p>
             <a:r>
-              <a:rPr lang="en-US" smtClean="0"/>
+              <a:rPr lang="en-US"/>
               <a:t>Click to edit Master title style</a:t>
             </a:r>
-            <a:endParaRPr lang="en-US"/>
           </a:p>
         </p:txBody>
       </p:sp>
@@ -3922,38 +3696,37 @@
           <a:p>
             <a:pPr lvl="0"/>
             <a:r>
-              <a:rPr lang="en-US" smtClean="0"/>
+              <a:rPr lang="en-US"/>
               <a:t>Click to edit Master text styles</a:t>
             </a:r>
           </a:p>
           <a:p>
             <a:pPr lvl="1"/>
             <a:r>
-              <a:rPr lang="en-US" smtClean="0"/>
+              <a:rPr lang="en-US"/>
               <a:t>Second level</a:t>
             </a:r>
           </a:p>
           <a:p>
             <a:pPr lvl="2"/>
             <a:r>
-              <a:rPr lang="en-US" smtClean="0"/>
+              <a:rPr lang="en-US"/>
               <a:t>Third level</a:t>
             </a:r>
           </a:p>
           <a:p>
             <a:pPr lvl="3"/>
             <a:r>
-              <a:rPr lang="en-US" smtClean="0"/>
+              <a:rPr lang="en-US"/>
               <a:t>Fourth level</a:t>
             </a:r>
           </a:p>
           <a:p>
             <a:pPr lvl="4"/>
             <a:r>
-              <a:rPr lang="en-US" smtClean="0"/>
+              <a:rPr lang="en-US"/>
               <a:t>Fifth level</a:t>
             </a:r>
-            <a:endParaRPr lang="en-US"/>
           </a:p>
         </p:txBody>
       </p:sp>
@@ -3992,7 +3765,7 @@
           <a:p>
             <a:fld id="{5BCAD085-E8A6-8845-BD4E-CB4CCA059FC4}" type="datetimeFigureOut">
               <a:rPr lang="en-US" smtClean="0"/>
-              <a:t>1/27/13</a:t>
+              <a:t>10/20/2026</a:t>
             </a:fld>
             <a:endParaRPr lang="en-US"/>
           </a:p>
@@ -4351,7 +4124,7 @@
 </file>
 
 <file path=ppt/slides/slide1.xml><?xml version="1.0" encoding="utf-8"?>
-<p:sld xmlns:a="http://schemas.openxmlformats.org/drawingml/2006/main" xmlns:p="http://schemas.openxmlformats.org/presentationml/2006/main" xmlns:r="http://schemas.openxmlformats.org/officeDocument/2006/relationships">
+<p:sld xmlns:a="http://schemas.openxmlformats.org/drawingml/2006/main" xmlns:r="http://schemas.openxmlformats.org/officeDocument/2006/relationships" xmlns:p="http://schemas.openxmlformats.org/presentationml/2006/main">
   <p:cSld>
     <p:spTree>
       <p:nvGrpSpPr>
@@ -4359,7 +4132,14 @@
         <p:cNvGrpSpPr/>
         <p:nvPr/>
       </p:nvGrpSpPr>
-      <p:grpSpPr/>
+      <p:grpSpPr>
+        <a:xfrm>
+          <a:off x="0" y="0"/>
+          <a:ext cx="0" cy="0"/>
+          <a:chOff x="0" y="0"/>
+          <a:chExt cx="0" cy="0"/>
+        </a:xfrm>
+      </p:grpSpPr>
       <p:sp>
         <p:nvSpPr>
           <p:cNvPr id="2" name="TextBox 1"/>
@@ -4369,7 +4149,7 @@
         <p:spPr>
           <a:xfrm>
             <a:off x="548640" y="1828800"/>
-            <a:ext cx="10972800" cy="914400"/>
+            <a:ext cx="10972800" cy="707886"/>
           </a:xfrm>
           <a:prstGeom prst="rect">
             <a:avLst/>
@@ -4377,7 +4157,7 @@
           <a:noFill/>
         </p:spPr>
         <p:txBody>
-          <a:bodyPr wrap="square" anchor="t" lIns="45720" rIns="45720">
+          <a:bodyPr wrap="square" lIns="45720" rIns="45720" anchor="t">
             <a:spAutoFit/>
           </a:bodyPr>
           <a:lstStyle/>
@@ -4388,15 +4168,52 @@
               </a:spcAft>
             </a:pPr>
             <a:r>
-              <a:rPr sz="4000" b="1">
+              <a:rPr sz="4000" b="1" dirty="0">
                 <a:solidFill>
                   <a:srgbClr val="222222"/>
                 </a:solidFill>
                 <a:latin typeface="Microsoft YaHei"/>
                 <a:ea typeface="Microsoft YaHei"/>
               </a:rPr>
-              <a:t>论文说的，发表后还灵吗？</a:t>
-            </a:r>
+              <a:t>论</a:t>
+            </a:r>
+            <a:r>
+              <a:rPr lang="zh-CN" altLang="en-US" sz="4000" b="1" dirty="0">
+                <a:solidFill>
+                  <a:srgbClr val="222222"/>
+                </a:solidFill>
+                <a:latin typeface="Microsoft YaHei"/>
+                <a:ea typeface="Microsoft YaHei"/>
+              </a:rPr>
+              <a:t>文复刻</a:t>
+            </a:r>
+            <a:r>
+              <a:rPr lang="en-US" altLang="zh-CN" sz="4000" b="1" dirty="0">
+                <a:solidFill>
+                  <a:srgbClr val="222222"/>
+                </a:solidFill>
+                <a:latin typeface="Microsoft YaHei"/>
+                <a:ea typeface="Microsoft YaHei"/>
+              </a:rPr>
+              <a:t>VS</a:t>
+            </a:r>
+            <a:r>
+              <a:rPr lang="zh-CN" altLang="en-US" sz="4000" b="1" dirty="0">
+                <a:solidFill>
+                  <a:srgbClr val="222222"/>
+                </a:solidFill>
+                <a:latin typeface="Microsoft YaHei"/>
+                <a:ea typeface="Microsoft YaHei"/>
+              </a:rPr>
+              <a:t>机器学习？</a:t>
+            </a:r>
+            <a:endParaRPr sz="4000" b="1" dirty="0">
+              <a:solidFill>
+                <a:srgbClr val="222222"/>
+              </a:solidFill>
+              <a:latin typeface="Microsoft YaHei"/>
+              <a:ea typeface="Microsoft YaHei"/>
+            </a:endParaRPr>
           </a:p>
         </p:txBody>
       </p:sp>
@@ -4417,7 +4234,7 @@
           <a:noFill/>
         </p:spPr>
         <p:txBody>
-          <a:bodyPr wrap="square" anchor="t" lIns="45720" rIns="45720">
+          <a:bodyPr wrap="square" lIns="45720" rIns="45720" anchor="t">
             <a:spAutoFit/>
           </a:bodyPr>
           <a:lstStyle/>
@@ -4480,6 +4297,7 @@
           <a:lstStyle/>
           <a:p>
             <a:pPr algn="ctr"/>
+            <a:endParaRPr/>
           </a:p>
         </p:txBody>
       </p:sp>
@@ -4500,7 +4318,7 @@
           <a:noFill/>
         </p:spPr>
         <p:txBody>
-          <a:bodyPr wrap="square" anchor="t" lIns="45720" rIns="45720">
+          <a:bodyPr wrap="square" lIns="45720" rIns="45720" anchor="t">
             <a:spAutoFit/>
           </a:bodyPr>
           <a:lstStyle/>
@@ -4549,7 +4367,7 @@
 </file>
 
 <file path=ppt/slides/slide10.xml><?xml version="1.0" encoding="utf-8"?>
-<p:sld xmlns:a="http://schemas.openxmlformats.org/drawingml/2006/main" xmlns:p="http://schemas.openxmlformats.org/presentationml/2006/main" xmlns:r="http://schemas.openxmlformats.org/officeDocument/2006/relationships">
+<p:sld xmlns:a="http://schemas.openxmlformats.org/drawingml/2006/main" xmlns:r="http://schemas.openxmlformats.org/officeDocument/2006/relationships" xmlns:p="http://schemas.openxmlformats.org/presentationml/2006/main">
   <p:cSld>
     <p:spTree>
       <p:nvGrpSpPr>
@@ -4557,7 +4375,14 @@
         <p:cNvGrpSpPr/>
         <p:nvPr/>
       </p:nvGrpSpPr>
-      <p:grpSpPr/>
+      <p:grpSpPr>
+        <a:xfrm>
+          <a:off x="0" y="0"/>
+          <a:ext cx="0" cy="0"/>
+          <a:chOff x="0" y="0"/>
+          <a:chExt cx="0" cy="0"/>
+        </a:xfrm>
+      </p:grpSpPr>
       <p:sp>
         <p:nvSpPr>
           <p:cNvPr id="2" name="TextBox 1"/>
@@ -4575,7 +4400,7 @@
           <a:noFill/>
         </p:spPr>
         <p:txBody>
-          <a:bodyPr wrap="square" anchor="t" lIns="45720" rIns="45720">
+          <a:bodyPr wrap="square" lIns="45720" rIns="45720" anchor="t">
             <a:spAutoFit/>
           </a:bodyPr>
           <a:lstStyle/>
@@ -4615,7 +4440,7 @@
           <a:noFill/>
         </p:spPr>
         <p:txBody>
-          <a:bodyPr wrap="square" anchor="t" lIns="45720" rIns="45720">
+          <a:bodyPr wrap="square" lIns="45720" rIns="45720" anchor="t">
             <a:spAutoFit/>
           </a:bodyPr>
           <a:lstStyle/>
@@ -4678,6 +4503,7 @@
           <a:lstStyle/>
           <a:p>
             <a:pPr algn="ctr"/>
+            <a:endParaRPr/>
           </a:p>
         </p:txBody>
       </p:sp>
@@ -4690,7 +4516,7 @@
           <p:nvPr/>
         </p:nvPicPr>
         <p:blipFill>
-          <a:blip r:embed="rId2"/>
+          <a:blip r:embed="rId3"/>
           <a:stretch>
             <a:fillRect/>
           </a:stretch>
@@ -4722,7 +4548,7 @@
           <a:noFill/>
         </p:spPr>
         <p:txBody>
-          <a:bodyPr wrap="square" anchor="t" lIns="45720" rIns="45720">
+          <a:bodyPr wrap="square" lIns="45720" rIns="45720" anchor="t">
             <a:spAutoFit/>
           </a:bodyPr>
           <a:lstStyle/>
@@ -4815,27 +4641,36 @@
                 <a:tableStyleId>{5C22544A-7EE6-4342-B048-85BDC9FD1C3A}</a:tableStyleId>
               </a:tblPr>
               <a:tblGrid>
-                <a:gridCol w="1417319"/>
-                <a:gridCol w="960119"/>
-                <a:gridCol w="960119"/>
+                <a:gridCol w="1417319">
+                  <a:extLst>
+                    <a:ext uri="{9D8B030D-6E8A-4147-A177-3AD203B41FA5}">
+                      <a16:colId xmlns:a16="http://schemas.microsoft.com/office/drawing/2014/main" val="20000"/>
+                    </a:ext>
+                  </a:extLst>
+                </a:gridCol>
+                <a:gridCol w="960119">
+                  <a:extLst>
+                    <a:ext uri="{9D8B030D-6E8A-4147-A177-3AD203B41FA5}">
+                      <a16:colId xmlns:a16="http://schemas.microsoft.com/office/drawing/2014/main" val="20001"/>
+                    </a:ext>
+                  </a:extLst>
+                </a:gridCol>
+                <a:gridCol w="960119">
+                  <a:extLst>
+                    <a:ext uri="{9D8B030D-6E8A-4147-A177-3AD203B41FA5}">
+                      <a16:colId xmlns:a16="http://schemas.microsoft.com/office/drawing/2014/main" val="20002"/>
+                    </a:ext>
+                  </a:extLst>
+                </a:gridCol>
               </a:tblGrid>
               <a:tr h="512064">
                 <a:tc>
                   <a:txBody>
-                    <a:bodyPr wrap="square"/>
+                    <a:bodyPr/>
                     <a:lstStyle/>
                     <a:p>
                       <a:pPr algn="l"/>
-                      <a:r>
-                        <a:rPr sz="1300" b="1">
-                          <a:solidFill>
-                            <a:srgbClr val="FFFFFF"/>
-                          </a:solidFill>
-                          <a:latin typeface="Microsoft YaHei"/>
-                          <a:ea typeface="Microsoft YaHei"/>
-                        </a:rPr>
-                        <a:t/>
-                      </a:r>
+                      <a:endParaRPr/>
                     </a:p>
                   </a:txBody>
                   <a:tcPr marL="73152" marR="73152" anchor="ctr">
@@ -4846,7 +4681,7 @@
                 </a:tc>
                 <a:tc>
                   <a:txBody>
-                    <a:bodyPr wrap="square"/>
+                    <a:bodyPr/>
                     <a:lstStyle/>
                     <a:p>
                       <a:pPr algn="ctr"/>
@@ -4870,7 +4705,7 @@
                 </a:tc>
                 <a:tc>
                   <a:txBody>
-                    <a:bodyPr wrap="square"/>
+                    <a:bodyPr/>
                     <a:lstStyle/>
                     <a:p>
                       <a:pPr algn="ctr"/>
@@ -4892,11 +4727,16 @@
                     </a:solidFill>
                   </a:tcPr>
                 </a:tc>
+                <a:extLst>
+                  <a:ext uri="{0D108BD9-81ED-4DB2-BD59-A6C34878D82A}">
+                    <a16:rowId xmlns:a16="http://schemas.microsoft.com/office/drawing/2014/main" val="10000"/>
+                  </a:ext>
+                </a:extLst>
               </a:tr>
               <a:tr h="512064">
                 <a:tc>
                   <a:txBody>
-                    <a:bodyPr wrap="square"/>
+                    <a:bodyPr/>
                     <a:lstStyle/>
                     <a:p>
                       <a:pPr algn="l"/>
@@ -4920,7 +4760,7 @@
                 </a:tc>
                 <a:tc>
                   <a:txBody>
-                    <a:bodyPr wrap="square"/>
+                    <a:bodyPr/>
                     <a:lstStyle/>
                     <a:p>
                       <a:pPr algn="ctr"/>
@@ -4944,7 +4784,7 @@
                 </a:tc>
                 <a:tc>
                   <a:txBody>
-                    <a:bodyPr wrap="square"/>
+                    <a:bodyPr/>
                     <a:lstStyle/>
                     <a:p>
                       <a:pPr algn="ctr"/>
@@ -4966,11 +4806,16 @@
                     </a:solidFill>
                   </a:tcPr>
                 </a:tc>
+                <a:extLst>
+                  <a:ext uri="{0D108BD9-81ED-4DB2-BD59-A6C34878D82A}">
+                    <a16:rowId xmlns:a16="http://schemas.microsoft.com/office/drawing/2014/main" val="10001"/>
+                  </a:ext>
+                </a:extLst>
               </a:tr>
               <a:tr h="512064">
                 <a:tc>
                   <a:txBody>
-                    <a:bodyPr wrap="square"/>
+                    <a:bodyPr/>
                     <a:lstStyle/>
                     <a:p>
                       <a:pPr algn="l"/>
@@ -4994,7 +4839,7 @@
                 </a:tc>
                 <a:tc>
                   <a:txBody>
-                    <a:bodyPr wrap="square"/>
+                    <a:bodyPr/>
                     <a:lstStyle/>
                     <a:p>
                       <a:pPr algn="ctr"/>
@@ -5018,7 +4863,7 @@
                 </a:tc>
                 <a:tc>
                   <a:txBody>
-                    <a:bodyPr wrap="square"/>
+                    <a:bodyPr/>
                     <a:lstStyle/>
                     <a:p>
                       <a:pPr algn="ctr"/>
@@ -5040,11 +4885,16 @@
                     </a:solidFill>
                   </a:tcPr>
                 </a:tc>
+                <a:extLst>
+                  <a:ext uri="{0D108BD9-81ED-4DB2-BD59-A6C34878D82A}">
+                    <a16:rowId xmlns:a16="http://schemas.microsoft.com/office/drawing/2014/main" val="10002"/>
+                  </a:ext>
+                </a:extLst>
               </a:tr>
               <a:tr h="512064">
                 <a:tc>
                   <a:txBody>
-                    <a:bodyPr wrap="square"/>
+                    <a:bodyPr/>
                     <a:lstStyle/>
                     <a:p>
                       <a:pPr algn="l"/>
@@ -5068,7 +4918,7 @@
                 </a:tc>
                 <a:tc>
                   <a:txBody>
-                    <a:bodyPr wrap="square"/>
+                    <a:bodyPr/>
                     <a:lstStyle/>
                     <a:p>
                       <a:pPr algn="ctr"/>
@@ -5092,7 +4942,7 @@
                 </a:tc>
                 <a:tc>
                   <a:txBody>
-                    <a:bodyPr wrap="square"/>
+                    <a:bodyPr/>
                     <a:lstStyle/>
                     <a:p>
                       <a:pPr algn="ctr"/>
@@ -5114,11 +4964,16 @@
                     </a:solidFill>
                   </a:tcPr>
                 </a:tc>
+                <a:extLst>
+                  <a:ext uri="{0D108BD9-81ED-4DB2-BD59-A6C34878D82A}">
+                    <a16:rowId xmlns:a16="http://schemas.microsoft.com/office/drawing/2014/main" val="10003"/>
+                  </a:ext>
+                </a:extLst>
               </a:tr>
               <a:tr h="512064">
                 <a:tc>
                   <a:txBody>
-                    <a:bodyPr wrap="square"/>
+                    <a:bodyPr/>
                     <a:lstStyle/>
                     <a:p>
                       <a:pPr algn="l"/>
@@ -5142,7 +4997,7 @@
                 </a:tc>
                 <a:tc>
                   <a:txBody>
-                    <a:bodyPr wrap="square"/>
+                    <a:bodyPr/>
                     <a:lstStyle/>
                     <a:p>
                       <a:pPr algn="ctr"/>
@@ -5166,7 +5021,7 @@
                 </a:tc>
                 <a:tc>
                   <a:txBody>
-                    <a:bodyPr wrap="square"/>
+                    <a:bodyPr/>
                     <a:lstStyle/>
                     <a:p>
                       <a:pPr algn="ctr"/>
@@ -5188,11 +5043,16 @@
                     </a:solidFill>
                   </a:tcPr>
                 </a:tc>
+                <a:extLst>
+                  <a:ext uri="{0D108BD9-81ED-4DB2-BD59-A6C34878D82A}">
+                    <a16:rowId xmlns:a16="http://schemas.microsoft.com/office/drawing/2014/main" val="10004"/>
+                  </a:ext>
+                </a:extLst>
               </a:tr>
               <a:tr h="512064">
                 <a:tc>
                   <a:txBody>
-                    <a:bodyPr wrap="square"/>
+                    <a:bodyPr/>
                     <a:lstStyle/>
                     <a:p>
                       <a:pPr algn="l"/>
@@ -5216,7 +5076,7 @@
                 </a:tc>
                 <a:tc>
                   <a:txBody>
-                    <a:bodyPr wrap="square"/>
+                    <a:bodyPr/>
                     <a:lstStyle/>
                     <a:p>
                       <a:pPr algn="ctr"/>
@@ -5240,7 +5100,7 @@
                 </a:tc>
                 <a:tc>
                   <a:txBody>
-                    <a:bodyPr wrap="square"/>
+                    <a:bodyPr/>
                     <a:lstStyle/>
                     <a:p>
                       <a:pPr algn="ctr"/>
@@ -5262,11 +5122,16 @@
                     </a:solidFill>
                   </a:tcPr>
                 </a:tc>
+                <a:extLst>
+                  <a:ext uri="{0D108BD9-81ED-4DB2-BD59-A6C34878D82A}">
+                    <a16:rowId xmlns:a16="http://schemas.microsoft.com/office/drawing/2014/main" val="10005"/>
+                  </a:ext>
+                </a:extLst>
               </a:tr>
               <a:tr h="512064">
                 <a:tc>
                   <a:txBody>
-                    <a:bodyPr wrap="square"/>
+                    <a:bodyPr/>
                     <a:lstStyle/>
                     <a:p>
                       <a:pPr algn="l"/>
@@ -5290,7 +5155,7 @@
                 </a:tc>
                 <a:tc>
                   <a:txBody>
-                    <a:bodyPr wrap="square"/>
+                    <a:bodyPr/>
                     <a:lstStyle/>
                     <a:p>
                       <a:pPr algn="ctr"/>
@@ -5314,7 +5179,7 @@
                 </a:tc>
                 <a:tc>
                   <a:txBody>
-                    <a:bodyPr wrap="square"/>
+                    <a:bodyPr/>
                     <a:lstStyle/>
                     <a:p>
                       <a:pPr algn="ctr"/>
@@ -5336,6 +5201,11 @@
                     </a:solidFill>
                   </a:tcPr>
                 </a:tc>
+                <a:extLst>
+                  <a:ext uri="{0D108BD9-81ED-4DB2-BD59-A6C34878D82A}">
+                    <a16:rowId xmlns:a16="http://schemas.microsoft.com/office/drawing/2014/main" val="10006"/>
+                  </a:ext>
+                </a:extLst>
               </a:tr>
             </a:tbl>
           </a:graphicData>
@@ -5358,7 +5228,7 @@
           <a:noFill/>
         </p:spPr>
         <p:txBody>
-          <a:bodyPr wrap="square" anchor="t" lIns="45720" rIns="45720">
+          <a:bodyPr wrap="square" lIns="45720" rIns="45720" anchor="t">
             <a:spAutoFit/>
           </a:bodyPr>
           <a:lstStyle/>
@@ -5398,7 +5268,7 @@
           <a:noFill/>
         </p:spPr>
         <p:txBody>
-          <a:bodyPr wrap="square" anchor="t" lIns="45720" rIns="45720">
+          <a:bodyPr wrap="square" lIns="45720" rIns="45720" anchor="t">
             <a:spAutoFit/>
           </a:bodyPr>
           <a:lstStyle/>
@@ -5438,7 +5308,7 @@
           <a:noFill/>
         </p:spPr>
         <p:txBody>
-          <a:bodyPr wrap="square" anchor="t" lIns="45720" rIns="45720">
+          <a:bodyPr wrap="square" lIns="45720" rIns="45720" anchor="t">
             <a:spAutoFit/>
           </a:bodyPr>
           <a:lstStyle/>
@@ -5470,7 +5340,7 @@
 </file>
 
 <file path=ppt/slides/slide11.xml><?xml version="1.0" encoding="utf-8"?>
-<p:sld xmlns:a="http://schemas.openxmlformats.org/drawingml/2006/main" xmlns:p="http://schemas.openxmlformats.org/presentationml/2006/main" xmlns:r="http://schemas.openxmlformats.org/officeDocument/2006/relationships">
+<p:sld xmlns:a="http://schemas.openxmlformats.org/drawingml/2006/main" xmlns:r="http://schemas.openxmlformats.org/officeDocument/2006/relationships" xmlns:p="http://schemas.openxmlformats.org/presentationml/2006/main">
   <p:cSld>
     <p:spTree>
       <p:nvGrpSpPr>
@@ -5478,7 +5348,14 @@
         <p:cNvGrpSpPr/>
         <p:nvPr/>
       </p:nvGrpSpPr>
-      <p:grpSpPr/>
+      <p:grpSpPr>
+        <a:xfrm>
+          <a:off x="0" y="0"/>
+          <a:ext cx="0" cy="0"/>
+          <a:chOff x="0" y="0"/>
+          <a:chExt cx="0" cy="0"/>
+        </a:xfrm>
+      </p:grpSpPr>
       <p:sp>
         <p:nvSpPr>
           <p:cNvPr id="2" name="TextBox 1"/>
@@ -5496,7 +5373,7 @@
           <a:noFill/>
         </p:spPr>
         <p:txBody>
-          <a:bodyPr wrap="square" anchor="t" lIns="45720" rIns="45720">
+          <a:bodyPr wrap="square" lIns="45720" rIns="45720" anchor="t">
             <a:spAutoFit/>
           </a:bodyPr>
           <a:lstStyle/>
@@ -5536,7 +5413,7 @@
           <a:noFill/>
         </p:spPr>
         <p:txBody>
-          <a:bodyPr wrap="square" anchor="t" lIns="45720" rIns="45720">
+          <a:bodyPr wrap="square" lIns="45720" rIns="45720" anchor="t">
             <a:spAutoFit/>
           </a:bodyPr>
           <a:lstStyle/>
@@ -5599,6 +5476,7 @@
           <a:lstStyle/>
           <a:p>
             <a:pPr algn="ctr"/>
+            <a:endParaRPr/>
           </a:p>
         </p:txBody>
       </p:sp>
@@ -5621,15 +5499,39 @@
                 <a:tableStyleId>{5C22544A-7EE6-4342-B048-85BDC9FD1C3A}</a:tableStyleId>
               </a:tblPr>
               <a:tblGrid>
-                <a:gridCol w="1732547"/>
-                <a:gridCol w="1347536"/>
-                <a:gridCol w="1058778"/>
-                <a:gridCol w="1347536"/>
+                <a:gridCol w="1732547">
+                  <a:extLst>
+                    <a:ext uri="{9D8B030D-6E8A-4147-A177-3AD203B41FA5}">
+                      <a16:colId xmlns:a16="http://schemas.microsoft.com/office/drawing/2014/main" val="20000"/>
+                    </a:ext>
+                  </a:extLst>
+                </a:gridCol>
+                <a:gridCol w="1347536">
+                  <a:extLst>
+                    <a:ext uri="{9D8B030D-6E8A-4147-A177-3AD203B41FA5}">
+                      <a16:colId xmlns:a16="http://schemas.microsoft.com/office/drawing/2014/main" val="20001"/>
+                    </a:ext>
+                  </a:extLst>
+                </a:gridCol>
+                <a:gridCol w="1058778">
+                  <a:extLst>
+                    <a:ext uri="{9D8B030D-6E8A-4147-A177-3AD203B41FA5}">
+                      <a16:colId xmlns:a16="http://schemas.microsoft.com/office/drawing/2014/main" val="20002"/>
+                    </a:ext>
+                  </a:extLst>
+                </a:gridCol>
+                <a:gridCol w="1347536">
+                  <a:extLst>
+                    <a:ext uri="{9D8B030D-6E8A-4147-A177-3AD203B41FA5}">
+                      <a16:colId xmlns:a16="http://schemas.microsoft.com/office/drawing/2014/main" val="20003"/>
+                    </a:ext>
+                  </a:extLst>
+                </a:gridCol>
               </a:tblGrid>
               <a:tr h="566928">
                 <a:tc>
                   <a:txBody>
-                    <a:bodyPr wrap="square"/>
+                    <a:bodyPr/>
                     <a:lstStyle/>
                     <a:p>
                       <a:pPr algn="l"/>
@@ -5653,7 +5555,7 @@
                 </a:tc>
                 <a:tc>
                   <a:txBody>
-                    <a:bodyPr wrap="square"/>
+                    <a:bodyPr/>
                     <a:lstStyle/>
                     <a:p>
                       <a:pPr algn="ctr"/>
@@ -5677,7 +5579,7 @@
                 </a:tc>
                 <a:tc>
                   <a:txBody>
-                    <a:bodyPr wrap="square"/>
+                    <a:bodyPr/>
                     <a:lstStyle/>
                     <a:p>
                       <a:pPr algn="ctr"/>
@@ -5701,7 +5603,7 @@
                 </a:tc>
                 <a:tc>
                   <a:txBody>
-                    <a:bodyPr wrap="square"/>
+                    <a:bodyPr/>
                     <a:lstStyle/>
                     <a:p>
                       <a:pPr algn="ctr"/>
@@ -5723,11 +5625,16 @@
                     </a:solidFill>
                   </a:tcPr>
                 </a:tc>
+                <a:extLst>
+                  <a:ext uri="{0D108BD9-81ED-4DB2-BD59-A6C34878D82A}">
+                    <a16:rowId xmlns:a16="http://schemas.microsoft.com/office/drawing/2014/main" val="10000"/>
+                  </a:ext>
+                </a:extLst>
               </a:tr>
               <a:tr h="566928">
                 <a:tc>
                   <a:txBody>
-                    <a:bodyPr wrap="square"/>
+                    <a:bodyPr/>
                     <a:lstStyle/>
                     <a:p>
                       <a:pPr algn="l"/>
@@ -5751,7 +5658,7 @@
                 </a:tc>
                 <a:tc>
                   <a:txBody>
-                    <a:bodyPr wrap="square"/>
+                    <a:bodyPr/>
                     <a:lstStyle/>
                     <a:p>
                       <a:pPr algn="ctr"/>
@@ -5775,7 +5682,7 @@
                 </a:tc>
                 <a:tc>
                   <a:txBody>
-                    <a:bodyPr wrap="square"/>
+                    <a:bodyPr/>
                     <a:lstStyle/>
                     <a:p>
                       <a:pPr algn="ctr"/>
@@ -5799,7 +5706,7 @@
                 </a:tc>
                 <a:tc>
                   <a:txBody>
-                    <a:bodyPr wrap="square"/>
+                    <a:bodyPr/>
                     <a:lstStyle/>
                     <a:p>
                       <a:pPr algn="ctr"/>
@@ -5821,11 +5728,16 @@
                     </a:solidFill>
                   </a:tcPr>
                 </a:tc>
+                <a:extLst>
+                  <a:ext uri="{0D108BD9-81ED-4DB2-BD59-A6C34878D82A}">
+                    <a16:rowId xmlns:a16="http://schemas.microsoft.com/office/drawing/2014/main" val="10001"/>
+                  </a:ext>
+                </a:extLst>
               </a:tr>
               <a:tr h="566928">
                 <a:tc>
                   <a:txBody>
-                    <a:bodyPr wrap="square"/>
+                    <a:bodyPr/>
                     <a:lstStyle/>
                     <a:p>
                       <a:pPr algn="l"/>
@@ -5849,7 +5761,7 @@
                 </a:tc>
                 <a:tc>
                   <a:txBody>
-                    <a:bodyPr wrap="square"/>
+                    <a:bodyPr/>
                     <a:lstStyle/>
                     <a:p>
                       <a:pPr algn="ctr"/>
@@ -5873,7 +5785,7 @@
                 </a:tc>
                 <a:tc>
                   <a:txBody>
-                    <a:bodyPr wrap="square"/>
+                    <a:bodyPr/>
                     <a:lstStyle/>
                     <a:p>
                       <a:pPr algn="ctr"/>
@@ -5897,7 +5809,7 @@
                 </a:tc>
                 <a:tc>
                   <a:txBody>
-                    <a:bodyPr wrap="square"/>
+                    <a:bodyPr/>
                     <a:lstStyle/>
                     <a:p>
                       <a:pPr algn="ctr"/>
@@ -5919,11 +5831,16 @@
                     </a:solidFill>
                   </a:tcPr>
                 </a:tc>
+                <a:extLst>
+                  <a:ext uri="{0D108BD9-81ED-4DB2-BD59-A6C34878D82A}">
+                    <a16:rowId xmlns:a16="http://schemas.microsoft.com/office/drawing/2014/main" val="10002"/>
+                  </a:ext>
+                </a:extLst>
               </a:tr>
               <a:tr h="566928">
                 <a:tc>
                   <a:txBody>
-                    <a:bodyPr wrap="square"/>
+                    <a:bodyPr/>
                     <a:lstStyle/>
                     <a:p>
                       <a:pPr algn="l"/>
@@ -5947,7 +5864,7 @@
                 </a:tc>
                 <a:tc>
                   <a:txBody>
-                    <a:bodyPr wrap="square"/>
+                    <a:bodyPr/>
                     <a:lstStyle/>
                     <a:p>
                       <a:pPr algn="ctr"/>
@@ -5971,7 +5888,7 @@
                 </a:tc>
                 <a:tc>
                   <a:txBody>
-                    <a:bodyPr wrap="square"/>
+                    <a:bodyPr/>
                     <a:lstStyle/>
                     <a:p>
                       <a:pPr algn="ctr"/>
@@ -5995,7 +5912,7 @@
                 </a:tc>
                 <a:tc>
                   <a:txBody>
-                    <a:bodyPr wrap="square"/>
+                    <a:bodyPr/>
                     <a:lstStyle/>
                     <a:p>
                       <a:pPr algn="ctr"/>
@@ -6017,11 +5934,16 @@
                     </a:solidFill>
                   </a:tcPr>
                 </a:tc>
+                <a:extLst>
+                  <a:ext uri="{0D108BD9-81ED-4DB2-BD59-A6C34878D82A}">
+                    <a16:rowId xmlns:a16="http://schemas.microsoft.com/office/drawing/2014/main" val="10003"/>
+                  </a:ext>
+                </a:extLst>
               </a:tr>
               <a:tr h="566928">
                 <a:tc>
                   <a:txBody>
-                    <a:bodyPr wrap="square"/>
+                    <a:bodyPr/>
                     <a:lstStyle/>
                     <a:p>
                       <a:pPr algn="l"/>
@@ -6045,7 +5967,7 @@
                 </a:tc>
                 <a:tc>
                   <a:txBody>
-                    <a:bodyPr wrap="square"/>
+                    <a:bodyPr/>
                     <a:lstStyle/>
                     <a:p>
                       <a:pPr algn="ctr"/>
@@ -6069,7 +5991,7 @@
                 </a:tc>
                 <a:tc>
                   <a:txBody>
-                    <a:bodyPr wrap="square"/>
+                    <a:bodyPr/>
                     <a:lstStyle/>
                     <a:p>
                       <a:pPr algn="ctr"/>
@@ -6093,7 +6015,7 @@
                 </a:tc>
                 <a:tc>
                   <a:txBody>
-                    <a:bodyPr wrap="square"/>
+                    <a:bodyPr/>
                     <a:lstStyle/>
                     <a:p>
                       <a:pPr algn="ctr"/>
@@ -6115,6 +6037,11 @@
                     </a:solidFill>
                   </a:tcPr>
                 </a:tc>
+                <a:extLst>
+                  <a:ext uri="{0D108BD9-81ED-4DB2-BD59-A6C34878D82A}">
+                    <a16:rowId xmlns:a16="http://schemas.microsoft.com/office/drawing/2014/main" val="10004"/>
+                  </a:ext>
+                </a:extLst>
               </a:tr>
             </a:tbl>
           </a:graphicData>
@@ -6137,7 +6064,7 @@
           <a:noFill/>
         </p:spPr>
         <p:txBody>
-          <a:bodyPr wrap="square" anchor="t" lIns="45720" rIns="45720">
+          <a:bodyPr wrap="square" lIns="45720" rIns="45720" anchor="t">
             <a:spAutoFit/>
           </a:bodyPr>
           <a:lstStyle/>
@@ -6177,7 +6104,7 @@
           <a:noFill/>
         </p:spPr>
         <p:txBody>
-          <a:bodyPr wrap="square" anchor="t" lIns="45720" rIns="45720">
+          <a:bodyPr wrap="square" lIns="45720" rIns="45720" anchor="t">
             <a:spAutoFit/>
           </a:bodyPr>
           <a:lstStyle/>
@@ -6335,7 +6262,7 @@
           <a:noFill/>
         </p:spPr>
         <p:txBody>
-          <a:bodyPr wrap="square" anchor="t" lIns="45720" rIns="45720">
+          <a:bodyPr wrap="square" lIns="45720" rIns="45720" anchor="t">
             <a:spAutoFit/>
           </a:bodyPr>
           <a:lstStyle/>
@@ -6375,7 +6302,7 @@
           <a:noFill/>
         </p:spPr>
         <p:txBody>
-          <a:bodyPr wrap="square" anchor="t" lIns="45720" rIns="45720">
+          <a:bodyPr wrap="square" lIns="45720" rIns="45720" anchor="t">
             <a:spAutoFit/>
           </a:bodyPr>
           <a:lstStyle/>
@@ -6407,7 +6334,7 @@
 </file>
 
 <file path=ppt/slides/slide12.xml><?xml version="1.0" encoding="utf-8"?>
-<p:sld xmlns:a="http://schemas.openxmlformats.org/drawingml/2006/main" xmlns:p="http://schemas.openxmlformats.org/presentationml/2006/main" xmlns:r="http://schemas.openxmlformats.org/officeDocument/2006/relationships">
+<p:sld xmlns:a="http://schemas.openxmlformats.org/drawingml/2006/main" xmlns:r="http://schemas.openxmlformats.org/officeDocument/2006/relationships" xmlns:p="http://schemas.openxmlformats.org/presentationml/2006/main">
   <p:cSld>
     <p:spTree>
       <p:nvGrpSpPr>
@@ -6415,7 +6342,14 @@
         <p:cNvGrpSpPr/>
         <p:nvPr/>
       </p:nvGrpSpPr>
-      <p:grpSpPr/>
+      <p:grpSpPr>
+        <a:xfrm>
+          <a:off x="0" y="0"/>
+          <a:ext cx="0" cy="0"/>
+          <a:chOff x="0" y="0"/>
+          <a:chExt cx="0" cy="0"/>
+        </a:xfrm>
+      </p:grpSpPr>
       <p:sp>
         <p:nvSpPr>
           <p:cNvPr id="2" name="TextBox 1"/>
@@ -6433,7 +6367,7 @@
           <a:noFill/>
         </p:spPr>
         <p:txBody>
-          <a:bodyPr wrap="square" anchor="t" lIns="45720" rIns="45720">
+          <a:bodyPr wrap="square" lIns="45720" rIns="45720" anchor="t">
             <a:spAutoFit/>
           </a:bodyPr>
           <a:lstStyle/>
@@ -6473,7 +6407,7 @@
           <a:noFill/>
         </p:spPr>
         <p:txBody>
-          <a:bodyPr wrap="square" anchor="t" lIns="45720" rIns="45720">
+          <a:bodyPr wrap="square" lIns="45720" rIns="45720" anchor="t">
             <a:spAutoFit/>
           </a:bodyPr>
           <a:lstStyle/>
@@ -6536,6 +6470,7 @@
           <a:lstStyle/>
           <a:p>
             <a:pPr algn="ctr"/>
+            <a:endParaRPr/>
           </a:p>
         </p:txBody>
       </p:sp>
@@ -6556,7 +6491,7 @@
           <a:noFill/>
         </p:spPr>
         <p:txBody>
-          <a:bodyPr wrap="square" anchor="t" lIns="45720" rIns="45720">
+          <a:bodyPr wrap="square" lIns="45720" rIns="45720" anchor="t">
             <a:spAutoFit/>
           </a:bodyPr>
           <a:lstStyle/>
@@ -6687,6 +6622,7 @@
           <a:lstStyle/>
           <a:p>
             <a:pPr algn="ctr"/>
+            <a:endParaRPr/>
           </a:p>
         </p:txBody>
       </p:sp>
@@ -6707,7 +6643,7 @@
           <a:noFill/>
         </p:spPr>
         <p:txBody>
-          <a:bodyPr wrap="square" anchor="t" lIns="45720" rIns="45720">
+          <a:bodyPr wrap="square" lIns="45720" rIns="45720" anchor="t">
             <a:spAutoFit/>
           </a:bodyPr>
           <a:lstStyle/>
@@ -6747,7 +6683,7 @@
           <a:noFill/>
         </p:spPr>
         <p:txBody>
-          <a:bodyPr wrap="square" anchor="t" lIns="45720" rIns="45720">
+          <a:bodyPr wrap="square" lIns="45720" rIns="45720" anchor="t">
             <a:spAutoFit/>
           </a:bodyPr>
           <a:lstStyle/>
@@ -6855,7 +6791,7 @@
           <a:noFill/>
         </p:spPr>
         <p:txBody>
-          <a:bodyPr wrap="square" anchor="t" lIns="45720" rIns="45720">
+          <a:bodyPr wrap="square" lIns="45720" rIns="45720" anchor="t">
             <a:spAutoFit/>
           </a:bodyPr>
           <a:lstStyle/>
@@ -6895,7 +6831,7 @@
           <a:noFill/>
         </p:spPr>
         <p:txBody>
-          <a:bodyPr wrap="square" anchor="t" lIns="45720" rIns="45720">
+          <a:bodyPr wrap="square" lIns="45720" rIns="45720" anchor="t">
             <a:spAutoFit/>
           </a:bodyPr>
           <a:lstStyle/>
@@ -6927,7 +6863,7 @@
 </file>
 
 <file path=ppt/slides/slide13.xml><?xml version="1.0" encoding="utf-8"?>
-<p:sld xmlns:a="http://schemas.openxmlformats.org/drawingml/2006/main" xmlns:p="http://schemas.openxmlformats.org/presentationml/2006/main" xmlns:r="http://schemas.openxmlformats.org/officeDocument/2006/relationships">
+<p:sld xmlns:a="http://schemas.openxmlformats.org/drawingml/2006/main" xmlns:r="http://schemas.openxmlformats.org/officeDocument/2006/relationships" xmlns:p="http://schemas.openxmlformats.org/presentationml/2006/main">
   <p:cSld>
     <p:spTree>
       <p:nvGrpSpPr>
@@ -6935,7 +6871,14 @@
         <p:cNvGrpSpPr/>
         <p:nvPr/>
       </p:nvGrpSpPr>
-      <p:grpSpPr/>
+      <p:grpSpPr>
+        <a:xfrm>
+          <a:off x="0" y="0"/>
+          <a:ext cx="0" cy="0"/>
+          <a:chOff x="0" y="0"/>
+          <a:chExt cx="0" cy="0"/>
+        </a:xfrm>
+      </p:grpSpPr>
       <p:sp>
         <p:nvSpPr>
           <p:cNvPr id="2" name="TextBox 1"/>
@@ -6953,7 +6896,7 @@
           <a:noFill/>
         </p:spPr>
         <p:txBody>
-          <a:bodyPr wrap="square" anchor="t" lIns="45720" rIns="45720">
+          <a:bodyPr wrap="square" lIns="45720" rIns="45720" anchor="t">
             <a:spAutoFit/>
           </a:bodyPr>
           <a:lstStyle/>
@@ -6993,7 +6936,7 @@
           <a:noFill/>
         </p:spPr>
         <p:txBody>
-          <a:bodyPr wrap="square" anchor="t" lIns="45720" rIns="45720">
+          <a:bodyPr wrap="square" lIns="45720" rIns="45720" anchor="t">
             <a:spAutoFit/>
           </a:bodyPr>
           <a:lstStyle/>
@@ -7056,6 +6999,7 @@
           <a:lstStyle/>
           <a:p>
             <a:pPr algn="ctr"/>
+            <a:endParaRPr/>
           </a:p>
         </p:txBody>
       </p:sp>
@@ -7068,7 +7012,7 @@
           <p:nvPr/>
         </p:nvPicPr>
         <p:blipFill>
-          <a:blip r:embed="rId2"/>
+          <a:blip r:embed="rId3"/>
           <a:stretch>
             <a:fillRect/>
           </a:stretch>
@@ -7123,6 +7067,7 @@
           <a:lstStyle/>
           <a:p>
             <a:pPr algn="ctr"/>
+            <a:endParaRPr/>
           </a:p>
         </p:txBody>
       </p:sp>
@@ -7143,7 +7088,7 @@
           <a:noFill/>
         </p:spPr>
         <p:txBody>
-          <a:bodyPr wrap="square" anchor="t" lIns="45720" rIns="45720">
+          <a:bodyPr wrap="square" lIns="45720" rIns="45720" anchor="t">
             <a:spAutoFit/>
           </a:bodyPr>
           <a:lstStyle/>
@@ -7183,7 +7128,7 @@
           <a:noFill/>
         </p:spPr>
         <p:txBody>
-          <a:bodyPr wrap="square" anchor="t" lIns="45720" rIns="45720">
+          <a:bodyPr wrap="square" lIns="45720" rIns="45720" anchor="t">
             <a:spAutoFit/>
           </a:bodyPr>
           <a:lstStyle/>
@@ -7284,7 +7229,7 @@
           <a:noFill/>
         </p:spPr>
         <p:txBody>
-          <a:bodyPr wrap="square" anchor="t" lIns="45720" rIns="45720">
+          <a:bodyPr wrap="square" lIns="45720" rIns="45720" anchor="t">
             <a:spAutoFit/>
           </a:bodyPr>
           <a:lstStyle/>
@@ -7324,7 +7269,7 @@
           <a:noFill/>
         </p:spPr>
         <p:txBody>
-          <a:bodyPr wrap="square" anchor="t" lIns="45720" rIns="45720">
+          <a:bodyPr wrap="square" lIns="45720" rIns="45720" anchor="t">
             <a:spAutoFit/>
           </a:bodyPr>
           <a:lstStyle/>
@@ -7356,7 +7301,7 @@
 </file>
 
 <file path=ppt/slides/slide2.xml><?xml version="1.0" encoding="utf-8"?>
-<p:sld xmlns:a="http://schemas.openxmlformats.org/drawingml/2006/main" xmlns:p="http://schemas.openxmlformats.org/presentationml/2006/main" xmlns:r="http://schemas.openxmlformats.org/officeDocument/2006/relationships">
+<p:sld xmlns:a="http://schemas.openxmlformats.org/drawingml/2006/main" xmlns:r="http://schemas.openxmlformats.org/officeDocument/2006/relationships" xmlns:p="http://schemas.openxmlformats.org/presentationml/2006/main">
   <p:cSld>
     <p:spTree>
       <p:nvGrpSpPr>
@@ -7364,7 +7309,14 @@
         <p:cNvGrpSpPr/>
         <p:nvPr/>
       </p:nvGrpSpPr>
-      <p:grpSpPr/>
+      <p:grpSpPr>
+        <a:xfrm>
+          <a:off x="0" y="0"/>
+          <a:ext cx="0" cy="0"/>
+          <a:chOff x="0" y="0"/>
+          <a:chExt cx="0" cy="0"/>
+        </a:xfrm>
+      </p:grpSpPr>
       <p:sp>
         <p:nvSpPr>
           <p:cNvPr id="2" name="TextBox 1"/>
@@ -7382,7 +7334,7 @@
           <a:noFill/>
         </p:spPr>
         <p:txBody>
-          <a:bodyPr wrap="square" anchor="t" lIns="45720" rIns="45720">
+          <a:bodyPr wrap="square" lIns="45720" rIns="45720" anchor="t">
             <a:spAutoFit/>
           </a:bodyPr>
           <a:lstStyle/>
@@ -7422,7 +7374,7 @@
           <a:noFill/>
         </p:spPr>
         <p:txBody>
-          <a:bodyPr wrap="square" anchor="t" lIns="45720" rIns="45720">
+          <a:bodyPr wrap="square" lIns="45720" rIns="45720" anchor="t">
             <a:spAutoFit/>
           </a:bodyPr>
           <a:lstStyle/>
@@ -7485,6 +7437,7 @@
           <a:lstStyle/>
           <a:p>
             <a:pPr algn="ctr"/>
+            <a:endParaRPr/>
           </a:p>
         </p:txBody>
       </p:sp>
@@ -7505,7 +7458,7 @@
           <a:noFill/>
         </p:spPr>
         <p:txBody>
-          <a:bodyPr wrap="square" anchor="t" lIns="45720" rIns="45720">
+          <a:bodyPr wrap="square" lIns="45720" rIns="45720" anchor="t">
             <a:spAutoFit/>
           </a:bodyPr>
           <a:lstStyle/>
@@ -7686,6 +7639,7 @@
           <a:lstStyle/>
           <a:p>
             <a:pPr algn="ctr"/>
+            <a:endParaRPr/>
           </a:p>
         </p:txBody>
       </p:sp>
@@ -7706,7 +7660,7 @@
           <a:noFill/>
         </p:spPr>
         <p:txBody>
-          <a:bodyPr wrap="square" anchor="ctr" lIns="45720" rIns="45720">
+          <a:bodyPr wrap="square" lIns="45720" rIns="45720" anchor="ctr">
             <a:spAutoFit/>
           </a:bodyPr>
           <a:lstStyle/>
@@ -7746,7 +7700,7 @@
           <a:noFill/>
         </p:spPr>
         <p:txBody>
-          <a:bodyPr wrap="square" anchor="t" lIns="45720" rIns="45720">
+          <a:bodyPr wrap="square" lIns="45720" rIns="45720" anchor="t">
             <a:spAutoFit/>
           </a:bodyPr>
           <a:lstStyle/>
@@ -7786,7 +7740,7 @@
           <a:noFill/>
         </p:spPr>
         <p:txBody>
-          <a:bodyPr wrap="square" anchor="t" lIns="45720" rIns="45720">
+          <a:bodyPr wrap="square" lIns="45720" rIns="45720" anchor="t">
             <a:spAutoFit/>
           </a:bodyPr>
           <a:lstStyle/>
@@ -7818,7 +7772,7 @@
 </file>
 
 <file path=ppt/slides/slide3.xml><?xml version="1.0" encoding="utf-8"?>
-<p:sld xmlns:a="http://schemas.openxmlformats.org/drawingml/2006/main" xmlns:p="http://schemas.openxmlformats.org/presentationml/2006/main" xmlns:r="http://schemas.openxmlformats.org/officeDocument/2006/relationships">
+<p:sld xmlns:a="http://schemas.openxmlformats.org/drawingml/2006/main" xmlns:r="http://schemas.openxmlformats.org/officeDocument/2006/relationships" xmlns:p="http://schemas.openxmlformats.org/presentationml/2006/main">
   <p:cSld>
     <p:spTree>
       <p:nvGrpSpPr>
@@ -7826,7 +7780,14 @@
         <p:cNvGrpSpPr/>
         <p:nvPr/>
       </p:nvGrpSpPr>
-      <p:grpSpPr/>
+      <p:grpSpPr>
+        <a:xfrm>
+          <a:off x="0" y="0"/>
+          <a:ext cx="0" cy="0"/>
+          <a:chOff x="0" y="0"/>
+          <a:chExt cx="0" cy="0"/>
+        </a:xfrm>
+      </p:grpSpPr>
       <p:sp>
         <p:nvSpPr>
           <p:cNvPr id="2" name="TextBox 1"/>
@@ -7844,7 +7805,7 @@
           <a:noFill/>
         </p:spPr>
         <p:txBody>
-          <a:bodyPr wrap="square" anchor="t" lIns="45720" rIns="45720">
+          <a:bodyPr wrap="square" lIns="45720" rIns="45720" anchor="t">
             <a:spAutoFit/>
           </a:bodyPr>
           <a:lstStyle/>
@@ -7884,7 +7845,7 @@
           <a:noFill/>
         </p:spPr>
         <p:txBody>
-          <a:bodyPr wrap="square" anchor="t" lIns="45720" rIns="45720">
+          <a:bodyPr wrap="square" lIns="45720" rIns="45720" anchor="t">
             <a:spAutoFit/>
           </a:bodyPr>
           <a:lstStyle/>
@@ -7947,6 +7908,7 @@
           <a:lstStyle/>
           <a:p>
             <a:pPr algn="ctr"/>
+            <a:endParaRPr/>
           </a:p>
         </p:txBody>
       </p:sp>
@@ -7990,6 +7952,7 @@
           <a:lstStyle/>
           <a:p>
             <a:pPr algn="ctr"/>
+            <a:endParaRPr/>
           </a:p>
         </p:txBody>
       </p:sp>
@@ -8010,7 +7973,7 @@
           <a:noFill/>
         </p:spPr>
         <p:txBody>
-          <a:bodyPr wrap="square" anchor="t" lIns="45720" rIns="45720">
+          <a:bodyPr wrap="square" lIns="45720" rIns="45720" anchor="t">
             <a:spAutoFit/>
           </a:bodyPr>
           <a:lstStyle/>
@@ -8050,7 +8013,7 @@
           <a:noFill/>
         </p:spPr>
         <p:txBody>
-          <a:bodyPr wrap="square" anchor="t" lIns="45720" rIns="45720">
+          <a:bodyPr wrap="square" lIns="45720" rIns="45720" anchor="t">
             <a:spAutoFit/>
           </a:bodyPr>
           <a:lstStyle/>
@@ -8147,6 +8110,7 @@
           <a:lstStyle/>
           <a:p>
             <a:pPr algn="ctr"/>
+            <a:endParaRPr/>
           </a:p>
         </p:txBody>
       </p:sp>
@@ -8167,7 +8131,7 @@
           <a:noFill/>
         </p:spPr>
         <p:txBody>
-          <a:bodyPr wrap="square" anchor="t" lIns="45720" rIns="45720">
+          <a:bodyPr wrap="square" lIns="45720" rIns="45720" anchor="t">
             <a:spAutoFit/>
           </a:bodyPr>
           <a:lstStyle/>
@@ -8207,7 +8171,7 @@
           <a:noFill/>
         </p:spPr>
         <p:txBody>
-          <a:bodyPr wrap="square" anchor="t" lIns="45720" rIns="45720">
+          <a:bodyPr wrap="square" lIns="45720" rIns="45720" anchor="t">
             <a:spAutoFit/>
           </a:bodyPr>
           <a:lstStyle/>
@@ -8304,6 +8268,7 @@
           <a:lstStyle/>
           <a:p>
             <a:pPr algn="ctr"/>
+            <a:endParaRPr/>
           </a:p>
         </p:txBody>
       </p:sp>
@@ -8324,7 +8289,7 @@
           <a:noFill/>
         </p:spPr>
         <p:txBody>
-          <a:bodyPr wrap="square" anchor="t" lIns="45720" rIns="45720">
+          <a:bodyPr wrap="square" lIns="45720" rIns="45720" anchor="t">
             <a:spAutoFit/>
           </a:bodyPr>
           <a:lstStyle/>
@@ -8364,7 +8329,7 @@
           <a:noFill/>
         </p:spPr>
         <p:txBody>
-          <a:bodyPr wrap="square" anchor="t" lIns="45720" rIns="45720">
+          <a:bodyPr wrap="square" lIns="45720" rIns="45720" anchor="t">
             <a:spAutoFit/>
           </a:bodyPr>
           <a:lstStyle/>
@@ -8438,7 +8403,7 @@
           <a:noFill/>
         </p:spPr>
         <p:txBody>
-          <a:bodyPr wrap="square" anchor="t" lIns="45720" rIns="45720">
+          <a:bodyPr wrap="square" lIns="45720" rIns="45720" anchor="t">
             <a:spAutoFit/>
           </a:bodyPr>
           <a:lstStyle/>
@@ -8495,7 +8460,7 @@
           <a:noFill/>
         </p:spPr>
         <p:txBody>
-          <a:bodyPr wrap="square" anchor="t" lIns="45720" rIns="45720">
+          <a:bodyPr wrap="square" lIns="45720" rIns="45720" anchor="t">
             <a:spAutoFit/>
           </a:bodyPr>
           <a:lstStyle/>
@@ -8535,7 +8500,7 @@
           <a:noFill/>
         </p:spPr>
         <p:txBody>
-          <a:bodyPr wrap="square" anchor="t" lIns="45720" rIns="45720">
+          <a:bodyPr wrap="square" lIns="45720" rIns="45720" anchor="t">
             <a:spAutoFit/>
           </a:bodyPr>
           <a:lstStyle/>
@@ -8567,7 +8532,7 @@
 </file>
 
 <file path=ppt/slides/slide4.xml><?xml version="1.0" encoding="utf-8"?>
-<p:sld xmlns:a="http://schemas.openxmlformats.org/drawingml/2006/main" xmlns:p="http://schemas.openxmlformats.org/presentationml/2006/main" xmlns:r="http://schemas.openxmlformats.org/officeDocument/2006/relationships">
+<p:sld xmlns:a="http://schemas.openxmlformats.org/drawingml/2006/main" xmlns:r="http://schemas.openxmlformats.org/officeDocument/2006/relationships" xmlns:p="http://schemas.openxmlformats.org/presentationml/2006/main">
   <p:cSld>
     <p:spTree>
       <p:nvGrpSpPr>
@@ -8575,7 +8540,14 @@
         <p:cNvGrpSpPr/>
         <p:nvPr/>
       </p:nvGrpSpPr>
-      <p:grpSpPr/>
+      <p:grpSpPr>
+        <a:xfrm>
+          <a:off x="0" y="0"/>
+          <a:ext cx="0" cy="0"/>
+          <a:chOff x="0" y="0"/>
+          <a:chExt cx="0" cy="0"/>
+        </a:xfrm>
+      </p:grpSpPr>
       <p:sp>
         <p:nvSpPr>
           <p:cNvPr id="2" name="TextBox 1"/>
@@ -8593,7 +8565,7 @@
           <a:noFill/>
         </p:spPr>
         <p:txBody>
-          <a:bodyPr wrap="square" anchor="t" lIns="45720" rIns="45720">
+          <a:bodyPr wrap="square" lIns="45720" rIns="45720" anchor="t">
             <a:spAutoFit/>
           </a:bodyPr>
           <a:lstStyle/>
@@ -8633,7 +8605,7 @@
           <a:noFill/>
         </p:spPr>
         <p:txBody>
-          <a:bodyPr wrap="square" anchor="t" lIns="45720" rIns="45720">
+          <a:bodyPr wrap="square" lIns="45720" rIns="45720" anchor="t">
             <a:spAutoFit/>
           </a:bodyPr>
           <a:lstStyle/>
@@ -8696,6 +8668,7 @@
           <a:lstStyle/>
           <a:p>
             <a:pPr algn="ctr"/>
+            <a:endParaRPr/>
           </a:p>
         </p:txBody>
       </p:sp>
@@ -8716,7 +8689,7 @@
           <a:noFill/>
         </p:spPr>
         <p:txBody>
-          <a:bodyPr wrap="square" anchor="t" lIns="45720" rIns="45720">
+          <a:bodyPr wrap="square" lIns="45720" rIns="45720" anchor="t">
             <a:spAutoFit/>
           </a:bodyPr>
           <a:lstStyle/>
@@ -8924,6 +8897,7 @@
           <a:lstStyle/>
           <a:p>
             <a:pPr algn="ctr"/>
+            <a:endParaRPr/>
           </a:p>
         </p:txBody>
       </p:sp>
@@ -8944,7 +8918,7 @@
           <a:noFill/>
         </p:spPr>
         <p:txBody>
-          <a:bodyPr wrap="square" anchor="t" lIns="45720" rIns="45720">
+          <a:bodyPr wrap="square" lIns="45720" rIns="45720" anchor="t">
             <a:spAutoFit/>
           </a:bodyPr>
           <a:lstStyle/>
@@ -8984,7 +8958,7 @@
           <a:noFill/>
         </p:spPr>
         <p:txBody>
-          <a:bodyPr wrap="square" anchor="t" lIns="45720" rIns="45720">
+          <a:bodyPr wrap="square" lIns="45720" rIns="45720" anchor="t">
             <a:spAutoFit/>
           </a:bodyPr>
           <a:lstStyle/>
@@ -9058,7 +9032,7 @@
           <a:noFill/>
         </p:spPr>
         <p:txBody>
-          <a:bodyPr wrap="square" anchor="t" lIns="45720" rIns="45720">
+          <a:bodyPr wrap="square" lIns="45720" rIns="45720" anchor="t">
             <a:spAutoFit/>
           </a:bodyPr>
           <a:lstStyle/>
@@ -9098,7 +9072,7 @@
           <a:noFill/>
         </p:spPr>
         <p:txBody>
-          <a:bodyPr wrap="square" anchor="t" lIns="45720" rIns="45720">
+          <a:bodyPr wrap="square" lIns="45720" rIns="45720" anchor="t">
             <a:spAutoFit/>
           </a:bodyPr>
           <a:lstStyle/>
@@ -9130,7 +9104,7 @@
 </file>
 
 <file path=ppt/slides/slide5.xml><?xml version="1.0" encoding="utf-8"?>
-<p:sld xmlns:a="http://schemas.openxmlformats.org/drawingml/2006/main" xmlns:p="http://schemas.openxmlformats.org/presentationml/2006/main" xmlns:r="http://schemas.openxmlformats.org/officeDocument/2006/relationships">
+<p:sld xmlns:a="http://schemas.openxmlformats.org/drawingml/2006/main" xmlns:r="http://schemas.openxmlformats.org/officeDocument/2006/relationships" xmlns:p="http://schemas.openxmlformats.org/presentationml/2006/main">
   <p:cSld>
     <p:spTree>
       <p:nvGrpSpPr>
@@ -9138,7 +9112,14 @@
         <p:cNvGrpSpPr/>
         <p:nvPr/>
       </p:nvGrpSpPr>
-      <p:grpSpPr/>
+      <p:grpSpPr>
+        <a:xfrm>
+          <a:off x="0" y="0"/>
+          <a:ext cx="0" cy="0"/>
+          <a:chOff x="0" y="0"/>
+          <a:chExt cx="0" cy="0"/>
+        </a:xfrm>
+      </p:grpSpPr>
       <p:sp>
         <p:nvSpPr>
           <p:cNvPr id="2" name="TextBox 1"/>
@@ -9156,7 +9137,7 @@
           <a:noFill/>
         </p:spPr>
         <p:txBody>
-          <a:bodyPr wrap="square" anchor="t" lIns="45720" rIns="45720">
+          <a:bodyPr wrap="square" lIns="45720" rIns="45720" anchor="t">
             <a:spAutoFit/>
           </a:bodyPr>
           <a:lstStyle/>
@@ -9196,7 +9177,7 @@
           <a:noFill/>
         </p:spPr>
         <p:txBody>
-          <a:bodyPr wrap="square" anchor="t" lIns="45720" rIns="45720">
+          <a:bodyPr wrap="square" lIns="45720" rIns="45720" anchor="t">
             <a:spAutoFit/>
           </a:bodyPr>
           <a:lstStyle/>
@@ -9259,6 +9240,7 @@
           <a:lstStyle/>
           <a:p>
             <a:pPr algn="ctr"/>
+            <a:endParaRPr/>
           </a:p>
         </p:txBody>
       </p:sp>
@@ -9281,14 +9263,32 @@
                 <a:tableStyleId>{5C22544A-7EE6-4342-B048-85BDC9FD1C3A}</a:tableStyleId>
               </a:tblPr>
               <a:tblGrid>
-                <a:gridCol w="1828800"/>
-                <a:gridCol w="4572000"/>
-                <a:gridCol w="4663439"/>
+                <a:gridCol w="1828800">
+                  <a:extLst>
+                    <a:ext uri="{9D8B030D-6E8A-4147-A177-3AD203B41FA5}">
+                      <a16:colId xmlns:a16="http://schemas.microsoft.com/office/drawing/2014/main" val="20000"/>
+                    </a:ext>
+                  </a:extLst>
+                </a:gridCol>
+                <a:gridCol w="4572000">
+                  <a:extLst>
+                    <a:ext uri="{9D8B030D-6E8A-4147-A177-3AD203B41FA5}">
+                      <a16:colId xmlns:a16="http://schemas.microsoft.com/office/drawing/2014/main" val="20001"/>
+                    </a:ext>
+                  </a:extLst>
+                </a:gridCol>
+                <a:gridCol w="4663439">
+                  <a:extLst>
+                    <a:ext uri="{9D8B030D-6E8A-4147-A177-3AD203B41FA5}">
+                      <a16:colId xmlns:a16="http://schemas.microsoft.com/office/drawing/2014/main" val="20002"/>
+                    </a:ext>
+                  </a:extLst>
+                </a:gridCol>
               </a:tblGrid>
               <a:tr h="713232">
                 <a:tc>
                   <a:txBody>
-                    <a:bodyPr wrap="square"/>
+                    <a:bodyPr/>
                     <a:lstStyle/>
                     <a:p>
                       <a:pPr algn="l"/>
@@ -9312,7 +9312,7 @@
                 </a:tc>
                 <a:tc>
                   <a:txBody>
-                    <a:bodyPr wrap="square"/>
+                    <a:bodyPr/>
                     <a:lstStyle/>
                     <a:p>
                       <a:pPr algn="ctr"/>
@@ -9336,7 +9336,7 @@
                 </a:tc>
                 <a:tc>
                   <a:txBody>
-                    <a:bodyPr wrap="square"/>
+                    <a:bodyPr/>
                     <a:lstStyle/>
                     <a:p>
                       <a:pPr algn="ctr"/>
@@ -9358,11 +9358,16 @@
                     </a:solidFill>
                   </a:tcPr>
                 </a:tc>
+                <a:extLst>
+                  <a:ext uri="{0D108BD9-81ED-4DB2-BD59-A6C34878D82A}">
+                    <a16:rowId xmlns:a16="http://schemas.microsoft.com/office/drawing/2014/main" val="10000"/>
+                  </a:ext>
+                </a:extLst>
               </a:tr>
               <a:tr h="713232">
                 <a:tc>
                   <a:txBody>
-                    <a:bodyPr wrap="square"/>
+                    <a:bodyPr/>
                     <a:lstStyle/>
                     <a:p>
                       <a:pPr algn="l"/>
@@ -9386,7 +9391,7 @@
                 </a:tc>
                 <a:tc>
                   <a:txBody>
-                    <a:bodyPr wrap="square"/>
+                    <a:bodyPr/>
                     <a:lstStyle/>
                     <a:p>
                       <a:pPr algn="ctr"/>
@@ -9410,7 +9415,7 @@
                 </a:tc>
                 <a:tc>
                   <a:txBody>
-                    <a:bodyPr wrap="square"/>
+                    <a:bodyPr/>
                     <a:lstStyle/>
                     <a:p>
                       <a:pPr algn="ctr"/>
@@ -9432,11 +9437,16 @@
                     </a:solidFill>
                   </a:tcPr>
                 </a:tc>
+                <a:extLst>
+                  <a:ext uri="{0D108BD9-81ED-4DB2-BD59-A6C34878D82A}">
+                    <a16:rowId xmlns:a16="http://schemas.microsoft.com/office/drawing/2014/main" val="10001"/>
+                  </a:ext>
+                </a:extLst>
               </a:tr>
               <a:tr h="713232">
                 <a:tc>
                   <a:txBody>
-                    <a:bodyPr wrap="square"/>
+                    <a:bodyPr/>
                     <a:lstStyle/>
                     <a:p>
                       <a:pPr algn="l"/>
@@ -9460,7 +9470,7 @@
                 </a:tc>
                 <a:tc>
                   <a:txBody>
-                    <a:bodyPr wrap="square"/>
+                    <a:bodyPr/>
                     <a:lstStyle/>
                     <a:p>
                       <a:pPr algn="ctr"/>
@@ -9484,7 +9494,7 @@
                 </a:tc>
                 <a:tc>
                   <a:txBody>
-                    <a:bodyPr wrap="square"/>
+                    <a:bodyPr/>
                     <a:lstStyle/>
                     <a:p>
                       <a:pPr algn="ctr"/>
@@ -9506,24 +9516,46 @@
                     </a:solidFill>
                   </a:tcPr>
                 </a:tc>
+                <a:extLst>
+                  <a:ext uri="{0D108BD9-81ED-4DB2-BD59-A6C34878D82A}">
+                    <a16:rowId xmlns:a16="http://schemas.microsoft.com/office/drawing/2014/main" val="10002"/>
+                  </a:ext>
+                </a:extLst>
               </a:tr>
               <a:tr h="713232">
                 <a:tc>
                   <a:txBody>
-                    <a:bodyPr wrap="square"/>
+                    <a:bodyPr/>
                     <a:lstStyle/>
                     <a:p>
                       <a:pPr algn="l"/>
                       <a:r>
-                        <a:rPr sz="1400" b="0">
+                        <a:rPr sz="1400" b="0" dirty="0">
                           <a:solidFill>
                             <a:srgbClr val="222222"/>
                           </a:solidFill>
                           <a:latin typeface="Microsoft YaHei"/>
                           <a:ea typeface="Microsoft YaHei"/>
                         </a:rPr>
-                        <a:t>3 和一直持有比</a:t>
+                        <a:t>3 </a:t>
                       </a:r>
+                      <a:r>
+                        <a:rPr sz="1400" b="0" dirty="0" err="1">
+                          <a:solidFill>
+                            <a:srgbClr val="222222"/>
+                          </a:solidFill>
+                          <a:latin typeface="Microsoft YaHei"/>
+                          <a:ea typeface="Microsoft YaHei"/>
+                        </a:rPr>
+                        <a:t>和一直持有比</a:t>
+                      </a:r>
+                      <a:endParaRPr sz="1400" b="0" dirty="0">
+                        <a:solidFill>
+                          <a:srgbClr val="222222"/>
+                        </a:solidFill>
+                        <a:latin typeface="Microsoft YaHei"/>
+                        <a:ea typeface="Microsoft YaHei"/>
+                      </a:endParaRPr>
                     </a:p>
                   </a:txBody>
                   <a:tcPr marL="73152" marR="73152" anchor="ctr">
@@ -9534,7 +9566,7 @@
                 </a:tc>
                 <a:tc>
                   <a:txBody>
-                    <a:bodyPr wrap="square"/>
+                    <a:bodyPr/>
                     <a:lstStyle/>
                     <a:p>
                       <a:pPr algn="ctr"/>
@@ -9558,7 +9590,7 @@
                 </a:tc>
                 <a:tc>
                   <a:txBody>
-                    <a:bodyPr wrap="square"/>
+                    <a:bodyPr/>
                     <a:lstStyle/>
                     <a:p>
                       <a:pPr algn="ctr"/>
@@ -9580,11 +9612,16 @@
                     </a:solidFill>
                   </a:tcPr>
                 </a:tc>
+                <a:extLst>
+                  <a:ext uri="{0D108BD9-81ED-4DB2-BD59-A6C34878D82A}">
+                    <a16:rowId xmlns:a16="http://schemas.microsoft.com/office/drawing/2014/main" val="10003"/>
+                  </a:ext>
+                </a:extLst>
               </a:tr>
               <a:tr h="713232">
                 <a:tc>
                   <a:txBody>
-                    <a:bodyPr wrap="square"/>
+                    <a:bodyPr/>
                     <a:lstStyle/>
                     <a:p>
                       <a:pPr algn="l"/>
@@ -9608,7 +9645,7 @@
                 </a:tc>
                 <a:tc>
                   <a:txBody>
-                    <a:bodyPr wrap="square"/>
+                    <a:bodyPr/>
                     <a:lstStyle/>
                     <a:p>
                       <a:pPr algn="ctr"/>
@@ -9632,20 +9669,67 @@
                 </a:tc>
                 <a:tc>
                   <a:txBody>
-                    <a:bodyPr wrap="square"/>
+                    <a:bodyPr/>
                     <a:lstStyle/>
                     <a:p>
                       <a:pPr algn="ctr"/>
                       <a:r>
-                        <a:rPr sz="1400" b="0">
+                        <a:rPr sz="1400" b="0" dirty="0" err="1">
                           <a:solidFill>
                             <a:srgbClr val="222222"/>
                           </a:solidFill>
                           <a:latin typeface="Microsoft YaHei"/>
                           <a:ea typeface="Microsoft YaHei"/>
                         </a:rPr>
-                        <a:t>发表后：主策略年化 3.1%，与同等仓位持有 3.2% 打平</a:t>
+                        <a:t>发表后：主策略年化</a:t>
                       </a:r>
+                      <a:r>
+                        <a:rPr sz="1400" b="0" dirty="0">
+                          <a:solidFill>
+                            <a:srgbClr val="222222"/>
+                          </a:solidFill>
+                          <a:latin typeface="Microsoft YaHei"/>
+                          <a:ea typeface="Microsoft YaHei"/>
+                        </a:rPr>
+                        <a:t> 3.1%，</a:t>
+                      </a:r>
+                      <a:r>
+                        <a:rPr sz="1400" b="0" dirty="0" err="1">
+                          <a:solidFill>
+                            <a:srgbClr val="222222"/>
+                          </a:solidFill>
+                          <a:latin typeface="Microsoft YaHei"/>
+                          <a:ea typeface="Microsoft YaHei"/>
+                        </a:rPr>
+                        <a:t>与同等仓位持有</a:t>
+                      </a:r>
+                      <a:r>
+                        <a:rPr sz="1400" b="0" dirty="0">
+                          <a:solidFill>
+                            <a:srgbClr val="222222"/>
+                          </a:solidFill>
+                          <a:latin typeface="Microsoft YaHei"/>
+                          <a:ea typeface="Microsoft YaHei"/>
+                        </a:rPr>
+                        <a:t> 3.2% </a:t>
+                      </a:r>
+                      <a:r>
+                        <a:rPr sz="1400" b="0" dirty="0" err="1">
+                          <a:solidFill>
+                            <a:srgbClr val="222222"/>
+                          </a:solidFill>
+                          <a:latin typeface="Microsoft YaHei"/>
+                          <a:ea typeface="Microsoft YaHei"/>
+                        </a:rPr>
+                        <a:t>打平</a:t>
+                      </a:r>
+                      <a:endParaRPr sz="1400" b="0" dirty="0">
+                        <a:solidFill>
+                          <a:srgbClr val="222222"/>
+                        </a:solidFill>
+                        <a:latin typeface="Microsoft YaHei"/>
+                        <a:ea typeface="Microsoft YaHei"/>
+                      </a:endParaRPr>
                     </a:p>
                   </a:txBody>
                   <a:tcPr marL="73152" marR="73152" anchor="ctr">
@@ -9654,6 +9738,11 @@
                     </a:solidFill>
                   </a:tcPr>
                 </a:tc>
+                <a:extLst>
+                  <a:ext uri="{0D108BD9-81ED-4DB2-BD59-A6C34878D82A}">
+                    <a16:rowId xmlns:a16="http://schemas.microsoft.com/office/drawing/2014/main" val="10004"/>
+                  </a:ext>
+                </a:extLst>
               </a:tr>
             </a:tbl>
           </a:graphicData>
@@ -9676,7 +9765,7 @@
           <a:noFill/>
         </p:spPr>
         <p:txBody>
-          <a:bodyPr wrap="square" anchor="t" lIns="45720" rIns="45720">
+          <a:bodyPr wrap="square" lIns="45720" rIns="45720" anchor="t">
             <a:spAutoFit/>
           </a:bodyPr>
           <a:lstStyle/>
@@ -9716,7 +9805,7 @@
           <a:noFill/>
         </p:spPr>
         <p:txBody>
-          <a:bodyPr wrap="square" anchor="t" lIns="45720" rIns="45720">
+          <a:bodyPr wrap="square" lIns="45720" rIns="45720" anchor="t">
             <a:spAutoFit/>
           </a:bodyPr>
           <a:lstStyle/>
@@ -9756,7 +9845,7 @@
           <a:noFill/>
         </p:spPr>
         <p:txBody>
-          <a:bodyPr wrap="square" anchor="t" lIns="45720" rIns="45720">
+          <a:bodyPr wrap="square" lIns="45720" rIns="45720" anchor="t">
             <a:spAutoFit/>
           </a:bodyPr>
           <a:lstStyle/>
@@ -9788,7 +9877,7 @@
 </file>
 
 <file path=ppt/slides/slide6.xml><?xml version="1.0" encoding="utf-8"?>
-<p:sld xmlns:a="http://schemas.openxmlformats.org/drawingml/2006/main" xmlns:p="http://schemas.openxmlformats.org/presentationml/2006/main" xmlns:r="http://schemas.openxmlformats.org/officeDocument/2006/relationships">
+<p:sld xmlns:a="http://schemas.openxmlformats.org/drawingml/2006/main" xmlns:r="http://schemas.openxmlformats.org/officeDocument/2006/relationships" xmlns:p="http://schemas.openxmlformats.org/presentationml/2006/main">
   <p:cSld>
     <p:spTree>
       <p:nvGrpSpPr>
@@ -9796,7 +9885,14 @@
         <p:cNvGrpSpPr/>
         <p:nvPr/>
       </p:nvGrpSpPr>
-      <p:grpSpPr/>
+      <p:grpSpPr>
+        <a:xfrm>
+          <a:off x="0" y="0"/>
+          <a:ext cx="0" cy="0"/>
+          <a:chOff x="0" y="0"/>
+          <a:chExt cx="0" cy="0"/>
+        </a:xfrm>
+      </p:grpSpPr>
       <p:sp>
         <p:nvSpPr>
           <p:cNvPr id="2" name="TextBox 1"/>
@@ -9814,7 +9910,7 @@
           <a:noFill/>
         </p:spPr>
         <p:txBody>
-          <a:bodyPr wrap="square" anchor="t" lIns="45720" rIns="45720">
+          <a:bodyPr wrap="square" lIns="45720" rIns="45720" anchor="t">
             <a:spAutoFit/>
           </a:bodyPr>
           <a:lstStyle/>
@@ -9854,7 +9950,7 @@
           <a:noFill/>
         </p:spPr>
         <p:txBody>
-          <a:bodyPr wrap="square" anchor="t" lIns="45720" rIns="45720">
+          <a:bodyPr wrap="square" lIns="45720" rIns="45720" anchor="t">
             <a:spAutoFit/>
           </a:bodyPr>
           <a:lstStyle/>
@@ -9917,6 +10013,7 @@
           <a:lstStyle/>
           <a:p>
             <a:pPr algn="ctr"/>
+            <a:endParaRPr/>
           </a:p>
         </p:txBody>
       </p:sp>
@@ -9929,7 +10026,7 @@
           <p:nvPr/>
         </p:nvPicPr>
         <p:blipFill>
-          <a:blip r:embed="rId2"/>
+          <a:blip r:embed="rId3"/>
           <a:stretch>
             <a:fillRect/>
           </a:stretch>
@@ -9961,7 +10058,7 @@
           <a:noFill/>
         </p:spPr>
         <p:txBody>
-          <a:bodyPr wrap="square" anchor="t" lIns="45720" rIns="45720">
+          <a:bodyPr wrap="square" lIns="45720" rIns="45720" anchor="t">
             <a:spAutoFit/>
           </a:bodyPr>
           <a:lstStyle/>
@@ -10024,6 +10121,7 @@
           <a:lstStyle/>
           <a:p>
             <a:pPr algn="ctr"/>
+            <a:endParaRPr/>
           </a:p>
         </p:txBody>
       </p:sp>
@@ -10044,7 +10142,7 @@
           <a:noFill/>
         </p:spPr>
         <p:txBody>
-          <a:bodyPr wrap="square" anchor="t" lIns="45720" rIns="45720">
+          <a:bodyPr wrap="square" lIns="45720" rIns="45720" anchor="t">
             <a:spAutoFit/>
           </a:bodyPr>
           <a:lstStyle/>
@@ -10084,7 +10182,7 @@
           <a:noFill/>
         </p:spPr>
         <p:txBody>
-          <a:bodyPr wrap="square" anchor="t" lIns="45720" rIns="45720">
+          <a:bodyPr wrap="square" lIns="45720" rIns="45720" anchor="t">
             <a:spAutoFit/>
           </a:bodyPr>
           <a:lstStyle/>
@@ -10242,7 +10340,7 @@
           <a:noFill/>
         </p:spPr>
         <p:txBody>
-          <a:bodyPr wrap="square" anchor="t" lIns="45720" rIns="45720">
+          <a:bodyPr wrap="square" lIns="45720" rIns="45720" anchor="t">
             <a:spAutoFit/>
           </a:bodyPr>
           <a:lstStyle/>
@@ -10282,7 +10380,7 @@
           <a:noFill/>
         </p:spPr>
         <p:txBody>
-          <a:bodyPr wrap="square" anchor="t" lIns="45720" rIns="45720">
+          <a:bodyPr wrap="square" lIns="45720" rIns="45720" anchor="t">
             <a:spAutoFit/>
           </a:bodyPr>
           <a:lstStyle/>
@@ -10314,7 +10412,7 @@
 </file>
 
 <file path=ppt/slides/slide7.xml><?xml version="1.0" encoding="utf-8"?>
-<p:sld xmlns:a="http://schemas.openxmlformats.org/drawingml/2006/main" xmlns:p="http://schemas.openxmlformats.org/presentationml/2006/main" xmlns:r="http://schemas.openxmlformats.org/officeDocument/2006/relationships">
+<p:sld xmlns:a="http://schemas.openxmlformats.org/drawingml/2006/main" xmlns:r="http://schemas.openxmlformats.org/officeDocument/2006/relationships" xmlns:p="http://schemas.openxmlformats.org/presentationml/2006/main">
   <p:cSld>
     <p:spTree>
       <p:nvGrpSpPr>
@@ -10322,7 +10420,14 @@
         <p:cNvGrpSpPr/>
         <p:nvPr/>
       </p:nvGrpSpPr>
-      <p:grpSpPr/>
+      <p:grpSpPr>
+        <a:xfrm>
+          <a:off x="0" y="0"/>
+          <a:ext cx="0" cy="0"/>
+          <a:chOff x="0" y="0"/>
+          <a:chExt cx="0" cy="0"/>
+        </a:xfrm>
+      </p:grpSpPr>
       <p:sp>
         <p:nvSpPr>
           <p:cNvPr id="2" name="TextBox 1"/>
@@ -10340,7 +10445,7 @@
           <a:noFill/>
         </p:spPr>
         <p:txBody>
-          <a:bodyPr wrap="square" anchor="t" lIns="45720" rIns="45720">
+          <a:bodyPr wrap="square" lIns="45720" rIns="45720" anchor="t">
             <a:spAutoFit/>
           </a:bodyPr>
           <a:lstStyle/>
@@ -10380,7 +10485,7 @@
           <a:noFill/>
         </p:spPr>
         <p:txBody>
-          <a:bodyPr wrap="square" anchor="t" lIns="45720" rIns="45720">
+          <a:bodyPr wrap="square" lIns="45720" rIns="45720" anchor="t">
             <a:spAutoFit/>
           </a:bodyPr>
           <a:lstStyle/>
@@ -10443,6 +10548,7 @@
           <a:lstStyle/>
           <a:p>
             <a:pPr algn="ctr"/>
+            <a:endParaRPr/>
           </a:p>
         </p:txBody>
       </p:sp>
@@ -10455,7 +10561,7 @@
           <p:nvPr/>
         </p:nvPicPr>
         <p:blipFill>
-          <a:blip r:embed="rId2"/>
+          <a:blip r:embed="rId3"/>
           <a:stretch>
             <a:fillRect/>
           </a:stretch>
@@ -10489,29 +10595,50 @@
                 <a:tableStyleId>{5C22544A-7EE6-4342-B048-85BDC9FD1C3A}</a:tableStyleId>
               </a:tblPr>
               <a:tblGrid>
-                <a:gridCol w="1387475"/>
-                <a:gridCol w="784225"/>
-                <a:gridCol w="784225"/>
-                <a:gridCol w="603250"/>
-                <a:gridCol w="784225"/>
+                <a:gridCol w="1387475">
+                  <a:extLst>
+                    <a:ext uri="{9D8B030D-6E8A-4147-A177-3AD203B41FA5}">
+                      <a16:colId xmlns:a16="http://schemas.microsoft.com/office/drawing/2014/main" val="20000"/>
+                    </a:ext>
+                  </a:extLst>
+                </a:gridCol>
+                <a:gridCol w="784225">
+                  <a:extLst>
+                    <a:ext uri="{9D8B030D-6E8A-4147-A177-3AD203B41FA5}">
+                      <a16:colId xmlns:a16="http://schemas.microsoft.com/office/drawing/2014/main" val="20001"/>
+                    </a:ext>
+                  </a:extLst>
+                </a:gridCol>
+                <a:gridCol w="784225">
+                  <a:extLst>
+                    <a:ext uri="{9D8B030D-6E8A-4147-A177-3AD203B41FA5}">
+                      <a16:colId xmlns:a16="http://schemas.microsoft.com/office/drawing/2014/main" val="20002"/>
+                    </a:ext>
+                  </a:extLst>
+                </a:gridCol>
+                <a:gridCol w="603250">
+                  <a:extLst>
+                    <a:ext uri="{9D8B030D-6E8A-4147-A177-3AD203B41FA5}">
+                      <a16:colId xmlns:a16="http://schemas.microsoft.com/office/drawing/2014/main" val="20003"/>
+                    </a:ext>
+                  </a:extLst>
+                </a:gridCol>
+                <a:gridCol w="784225">
+                  <a:extLst>
+                    <a:ext uri="{9D8B030D-6E8A-4147-A177-3AD203B41FA5}">
+                      <a16:colId xmlns:a16="http://schemas.microsoft.com/office/drawing/2014/main" val="20004"/>
+                    </a:ext>
+                  </a:extLst>
+                </a:gridCol>
               </a:tblGrid>
               <a:tr h="548640">
                 <a:tc>
                   <a:txBody>
-                    <a:bodyPr wrap="square"/>
+                    <a:bodyPr/>
                     <a:lstStyle/>
                     <a:p>
                       <a:pPr algn="l"/>
-                      <a:r>
-                        <a:rPr sz="1200" b="1">
-                          <a:solidFill>
-                            <a:srgbClr val="FFFFFF"/>
-                          </a:solidFill>
-                          <a:latin typeface="Microsoft YaHei"/>
-                          <a:ea typeface="Microsoft YaHei"/>
-                        </a:rPr>
-                        <a:t/>
-                      </a:r>
+                      <a:endParaRPr/>
                     </a:p>
                   </a:txBody>
                   <a:tcPr marL="73152" marR="73152" anchor="ctr">
@@ -10522,7 +10649,7 @@
                 </a:tc>
                 <a:tc>
                   <a:txBody>
-                    <a:bodyPr wrap="square"/>
+                    <a:bodyPr/>
                     <a:lstStyle/>
                     <a:p>
                       <a:pPr algn="ctr"/>
@@ -10546,7 +10673,7 @@
                 </a:tc>
                 <a:tc>
                   <a:txBody>
-                    <a:bodyPr wrap="square"/>
+                    <a:bodyPr/>
                     <a:lstStyle/>
                     <a:p>
                       <a:pPr algn="ctr"/>
@@ -10570,7 +10697,7 @@
                 </a:tc>
                 <a:tc>
                   <a:txBody>
-                    <a:bodyPr wrap="square"/>
+                    <a:bodyPr/>
                     <a:lstStyle/>
                     <a:p>
                       <a:pPr algn="ctr"/>
@@ -10594,7 +10721,7 @@
                 </a:tc>
                 <a:tc>
                   <a:txBody>
-                    <a:bodyPr wrap="square"/>
+                    <a:bodyPr/>
                     <a:lstStyle/>
                     <a:p>
                       <a:pPr algn="ctr"/>
@@ -10616,11 +10743,16 @@
                     </a:solidFill>
                   </a:tcPr>
                 </a:tc>
+                <a:extLst>
+                  <a:ext uri="{0D108BD9-81ED-4DB2-BD59-A6C34878D82A}">
+                    <a16:rowId xmlns:a16="http://schemas.microsoft.com/office/drawing/2014/main" val="10000"/>
+                  </a:ext>
+                </a:extLst>
               </a:tr>
               <a:tr h="548640">
                 <a:tc>
                   <a:txBody>
-                    <a:bodyPr wrap="square"/>
+                    <a:bodyPr/>
                     <a:lstStyle/>
                     <a:p>
                       <a:pPr algn="l"/>
@@ -10644,7 +10776,7 @@
                 </a:tc>
                 <a:tc>
                   <a:txBody>
-                    <a:bodyPr wrap="square"/>
+                    <a:bodyPr/>
                     <a:lstStyle/>
                     <a:p>
                       <a:pPr algn="ctr"/>
@@ -10668,7 +10800,7 @@
                 </a:tc>
                 <a:tc>
                   <a:txBody>
-                    <a:bodyPr wrap="square"/>
+                    <a:bodyPr/>
                     <a:lstStyle/>
                     <a:p>
                       <a:pPr algn="ctr"/>
@@ -10692,7 +10824,7 @@
                 </a:tc>
                 <a:tc>
                   <a:txBody>
-                    <a:bodyPr wrap="square"/>
+                    <a:bodyPr/>
                     <a:lstStyle/>
                     <a:p>
                       <a:pPr algn="ctr"/>
@@ -10716,7 +10848,7 @@
                 </a:tc>
                 <a:tc>
                   <a:txBody>
-                    <a:bodyPr wrap="square"/>
+                    <a:bodyPr/>
                     <a:lstStyle/>
                     <a:p>
                       <a:pPr algn="ctr"/>
@@ -10738,11 +10870,16 @@
                     </a:solidFill>
                   </a:tcPr>
                 </a:tc>
+                <a:extLst>
+                  <a:ext uri="{0D108BD9-81ED-4DB2-BD59-A6C34878D82A}">
+                    <a16:rowId xmlns:a16="http://schemas.microsoft.com/office/drawing/2014/main" val="10001"/>
+                  </a:ext>
+                </a:extLst>
               </a:tr>
               <a:tr h="548640">
                 <a:tc>
                   <a:txBody>
-                    <a:bodyPr wrap="square"/>
+                    <a:bodyPr/>
                     <a:lstStyle/>
                     <a:p>
                       <a:pPr algn="l"/>
@@ -10766,7 +10903,7 @@
                 </a:tc>
                 <a:tc>
                   <a:txBody>
-                    <a:bodyPr wrap="square"/>
+                    <a:bodyPr/>
                     <a:lstStyle/>
                     <a:p>
                       <a:pPr algn="ctr"/>
@@ -10790,7 +10927,7 @@
                 </a:tc>
                 <a:tc>
                   <a:txBody>
-                    <a:bodyPr wrap="square"/>
+                    <a:bodyPr/>
                     <a:lstStyle/>
                     <a:p>
                       <a:pPr algn="ctr"/>
@@ -10814,7 +10951,7 @@
                 </a:tc>
                 <a:tc>
                   <a:txBody>
-                    <a:bodyPr wrap="square"/>
+                    <a:bodyPr/>
                     <a:lstStyle/>
                     <a:p>
                       <a:pPr algn="ctr"/>
@@ -10838,7 +10975,7 @@
                 </a:tc>
                 <a:tc>
                   <a:txBody>
-                    <a:bodyPr wrap="square"/>
+                    <a:bodyPr/>
                     <a:lstStyle/>
                     <a:p>
                       <a:pPr algn="ctr"/>
@@ -10860,11 +10997,16 @@
                     </a:solidFill>
                   </a:tcPr>
                 </a:tc>
+                <a:extLst>
+                  <a:ext uri="{0D108BD9-81ED-4DB2-BD59-A6C34878D82A}">
+                    <a16:rowId xmlns:a16="http://schemas.microsoft.com/office/drawing/2014/main" val="10002"/>
+                  </a:ext>
+                </a:extLst>
               </a:tr>
               <a:tr h="548640">
                 <a:tc>
                   <a:txBody>
-                    <a:bodyPr wrap="square"/>
+                    <a:bodyPr/>
                     <a:lstStyle/>
                     <a:p>
                       <a:pPr algn="l"/>
@@ -10888,7 +11030,7 @@
                 </a:tc>
                 <a:tc>
                   <a:txBody>
-                    <a:bodyPr wrap="square"/>
+                    <a:bodyPr/>
                     <a:lstStyle/>
                     <a:p>
                       <a:pPr algn="ctr"/>
@@ -10912,7 +11054,7 @@
                 </a:tc>
                 <a:tc>
                   <a:txBody>
-                    <a:bodyPr wrap="square"/>
+                    <a:bodyPr/>
                     <a:lstStyle/>
                     <a:p>
                       <a:pPr algn="ctr"/>
@@ -10936,7 +11078,7 @@
                 </a:tc>
                 <a:tc>
                   <a:txBody>
-                    <a:bodyPr wrap="square"/>
+                    <a:bodyPr/>
                     <a:lstStyle/>
                     <a:p>
                       <a:pPr algn="ctr"/>
@@ -10960,7 +11102,7 @@
                 </a:tc>
                 <a:tc>
                   <a:txBody>
-                    <a:bodyPr wrap="square"/>
+                    <a:bodyPr/>
                     <a:lstStyle/>
                     <a:p>
                       <a:pPr algn="ctr"/>
@@ -10982,11 +11124,16 @@
                     </a:solidFill>
                   </a:tcPr>
                 </a:tc>
+                <a:extLst>
+                  <a:ext uri="{0D108BD9-81ED-4DB2-BD59-A6C34878D82A}">
+                    <a16:rowId xmlns:a16="http://schemas.microsoft.com/office/drawing/2014/main" val="10003"/>
+                  </a:ext>
+                </a:extLst>
               </a:tr>
               <a:tr h="548640">
                 <a:tc>
                   <a:txBody>
-                    <a:bodyPr wrap="square"/>
+                    <a:bodyPr/>
                     <a:lstStyle/>
                     <a:p>
                       <a:pPr algn="l"/>
@@ -11010,7 +11157,7 @@
                 </a:tc>
                 <a:tc>
                   <a:txBody>
-                    <a:bodyPr wrap="square"/>
+                    <a:bodyPr/>
                     <a:lstStyle/>
                     <a:p>
                       <a:pPr algn="ctr"/>
@@ -11034,7 +11181,7 @@
                 </a:tc>
                 <a:tc>
                   <a:txBody>
-                    <a:bodyPr wrap="square"/>
+                    <a:bodyPr/>
                     <a:lstStyle/>
                     <a:p>
                       <a:pPr algn="ctr"/>
@@ -11058,7 +11205,7 @@
                 </a:tc>
                 <a:tc>
                   <a:txBody>
-                    <a:bodyPr wrap="square"/>
+                    <a:bodyPr/>
                     <a:lstStyle/>
                     <a:p>
                       <a:pPr algn="ctr"/>
@@ -11082,7 +11229,7 @@
                 </a:tc>
                 <a:tc>
                   <a:txBody>
-                    <a:bodyPr wrap="square"/>
+                    <a:bodyPr/>
                     <a:lstStyle/>
                     <a:p>
                       <a:pPr algn="ctr"/>
@@ -11104,11 +11251,16 @@
                     </a:solidFill>
                   </a:tcPr>
                 </a:tc>
+                <a:extLst>
+                  <a:ext uri="{0D108BD9-81ED-4DB2-BD59-A6C34878D82A}">
+                    <a16:rowId xmlns:a16="http://schemas.microsoft.com/office/drawing/2014/main" val="10004"/>
+                  </a:ext>
+                </a:extLst>
               </a:tr>
               <a:tr h="548640">
                 <a:tc>
                   <a:txBody>
-                    <a:bodyPr wrap="square"/>
+                    <a:bodyPr/>
                     <a:lstStyle/>
                     <a:p>
                       <a:pPr algn="l"/>
@@ -11132,7 +11284,7 @@
                 </a:tc>
                 <a:tc>
                   <a:txBody>
-                    <a:bodyPr wrap="square"/>
+                    <a:bodyPr/>
                     <a:lstStyle/>
                     <a:p>
                       <a:pPr algn="ctr"/>
@@ -11156,7 +11308,7 @@
                 </a:tc>
                 <a:tc>
                   <a:txBody>
-                    <a:bodyPr wrap="square"/>
+                    <a:bodyPr/>
                     <a:lstStyle/>
                     <a:p>
                       <a:pPr algn="ctr"/>
@@ -11180,7 +11332,7 @@
                 </a:tc>
                 <a:tc>
                   <a:txBody>
-                    <a:bodyPr wrap="square"/>
+                    <a:bodyPr/>
                     <a:lstStyle/>
                     <a:p>
                       <a:pPr algn="ctr"/>
@@ -11204,7 +11356,7 @@
                 </a:tc>
                 <a:tc>
                   <a:txBody>
-                    <a:bodyPr wrap="square"/>
+                    <a:bodyPr/>
                     <a:lstStyle/>
                     <a:p>
                       <a:pPr algn="ctr"/>
@@ -11226,6 +11378,11 @@
                     </a:solidFill>
                   </a:tcPr>
                 </a:tc>
+                <a:extLst>
+                  <a:ext uri="{0D108BD9-81ED-4DB2-BD59-A6C34878D82A}">
+                    <a16:rowId xmlns:a16="http://schemas.microsoft.com/office/drawing/2014/main" val="10005"/>
+                  </a:ext>
+                </a:extLst>
               </a:tr>
             </a:tbl>
           </a:graphicData>
@@ -11248,7 +11405,7 @@
           <a:noFill/>
         </p:spPr>
         <p:txBody>
-          <a:bodyPr wrap="square" anchor="t" lIns="45720" rIns="45720">
+          <a:bodyPr wrap="square" lIns="45720" rIns="45720" anchor="t">
             <a:spAutoFit/>
           </a:bodyPr>
           <a:lstStyle/>
@@ -11288,7 +11445,7 @@
           <a:noFill/>
         </p:spPr>
         <p:txBody>
-          <a:bodyPr wrap="square" anchor="t" lIns="45720" rIns="45720">
+          <a:bodyPr wrap="square" lIns="45720" rIns="45720" anchor="t">
             <a:spAutoFit/>
           </a:bodyPr>
           <a:lstStyle/>
@@ -11320,7 +11477,7 @@
 </file>
 
 <file path=ppt/slides/slide8.xml><?xml version="1.0" encoding="utf-8"?>
-<p:sld xmlns:a="http://schemas.openxmlformats.org/drawingml/2006/main" xmlns:p="http://schemas.openxmlformats.org/presentationml/2006/main" xmlns:r="http://schemas.openxmlformats.org/officeDocument/2006/relationships">
+<p:sld xmlns:a="http://schemas.openxmlformats.org/drawingml/2006/main" xmlns:r="http://schemas.openxmlformats.org/officeDocument/2006/relationships" xmlns:p="http://schemas.openxmlformats.org/presentationml/2006/main">
   <p:cSld>
     <p:spTree>
       <p:nvGrpSpPr>
@@ -11328,7 +11485,14 @@
         <p:cNvGrpSpPr/>
         <p:nvPr/>
       </p:nvGrpSpPr>
-      <p:grpSpPr/>
+      <p:grpSpPr>
+        <a:xfrm>
+          <a:off x="0" y="0"/>
+          <a:ext cx="0" cy="0"/>
+          <a:chOff x="0" y="0"/>
+          <a:chExt cx="0" cy="0"/>
+        </a:xfrm>
+      </p:grpSpPr>
       <p:sp>
         <p:nvSpPr>
           <p:cNvPr id="2" name="TextBox 1"/>
@@ -11346,7 +11510,7 @@
           <a:noFill/>
         </p:spPr>
         <p:txBody>
-          <a:bodyPr wrap="square" anchor="t" lIns="45720" rIns="45720">
+          <a:bodyPr wrap="square" lIns="45720" rIns="45720" anchor="t">
             <a:spAutoFit/>
           </a:bodyPr>
           <a:lstStyle/>
@@ -11386,7 +11550,7 @@
           <a:noFill/>
         </p:spPr>
         <p:txBody>
-          <a:bodyPr wrap="square" anchor="t" lIns="45720" rIns="45720">
+          <a:bodyPr wrap="square" lIns="45720" rIns="45720" anchor="t">
             <a:spAutoFit/>
           </a:bodyPr>
           <a:lstStyle/>
@@ -11449,6 +11613,7 @@
           <a:lstStyle/>
           <a:p>
             <a:pPr algn="ctr"/>
+            <a:endParaRPr/>
           </a:p>
         </p:txBody>
       </p:sp>
@@ -11461,7 +11626,7 @@
           <p:nvPr/>
         </p:nvPicPr>
         <p:blipFill>
-          <a:blip r:embed="rId2"/>
+          <a:blip r:embed="rId3"/>
           <a:stretch>
             <a:fillRect/>
           </a:stretch>
@@ -11493,7 +11658,7 @@
           <a:noFill/>
         </p:spPr>
         <p:txBody>
-          <a:bodyPr wrap="square" anchor="t" lIns="45720" rIns="45720">
+          <a:bodyPr wrap="square" lIns="45720" rIns="45720" anchor="t">
             <a:spAutoFit/>
           </a:bodyPr>
           <a:lstStyle/>
@@ -11533,7 +11698,7 @@
           <a:noFill/>
         </p:spPr>
         <p:txBody>
-          <a:bodyPr wrap="square" anchor="t" lIns="45720" rIns="45720">
+          <a:bodyPr wrap="square" lIns="45720" rIns="45720" anchor="t">
             <a:spAutoFit/>
           </a:bodyPr>
           <a:lstStyle/>
@@ -11575,27 +11740,36 @@
                 <a:tableStyleId>{5C22544A-7EE6-4342-B048-85BDC9FD1C3A}</a:tableStyleId>
               </a:tblPr>
               <a:tblGrid>
-                <a:gridCol w="1097280"/>
-                <a:gridCol w="822960"/>
-                <a:gridCol w="822960"/>
+                <a:gridCol w="1097280">
+                  <a:extLst>
+                    <a:ext uri="{9D8B030D-6E8A-4147-A177-3AD203B41FA5}">
+                      <a16:colId xmlns:a16="http://schemas.microsoft.com/office/drawing/2014/main" val="20000"/>
+                    </a:ext>
+                  </a:extLst>
+                </a:gridCol>
+                <a:gridCol w="822960">
+                  <a:extLst>
+                    <a:ext uri="{9D8B030D-6E8A-4147-A177-3AD203B41FA5}">
+                      <a16:colId xmlns:a16="http://schemas.microsoft.com/office/drawing/2014/main" val="20001"/>
+                    </a:ext>
+                  </a:extLst>
+                </a:gridCol>
+                <a:gridCol w="822960">
+                  <a:extLst>
+                    <a:ext uri="{9D8B030D-6E8A-4147-A177-3AD203B41FA5}">
+                      <a16:colId xmlns:a16="http://schemas.microsoft.com/office/drawing/2014/main" val="20002"/>
+                    </a:ext>
+                  </a:extLst>
+                </a:gridCol>
               </a:tblGrid>
               <a:tr h="457200">
                 <a:tc>
                   <a:txBody>
-                    <a:bodyPr wrap="square"/>
+                    <a:bodyPr/>
                     <a:lstStyle/>
                     <a:p>
                       <a:pPr algn="l"/>
-                      <a:r>
-                        <a:rPr sz="1300" b="1">
-                          <a:solidFill>
-                            <a:srgbClr val="FFFFFF"/>
-                          </a:solidFill>
-                          <a:latin typeface="Microsoft YaHei"/>
-                          <a:ea typeface="Microsoft YaHei"/>
-                        </a:rPr>
-                        <a:t/>
-                      </a:r>
+                      <a:endParaRPr/>
                     </a:p>
                   </a:txBody>
                   <a:tcPr marL="73152" marR="73152" anchor="ctr">
@@ -11606,7 +11780,7 @@
                 </a:tc>
                 <a:tc>
                   <a:txBody>
-                    <a:bodyPr wrap="square"/>
+                    <a:bodyPr/>
                     <a:lstStyle/>
                     <a:p>
                       <a:pPr algn="ctr"/>
@@ -11630,7 +11804,7 @@
                 </a:tc>
                 <a:tc>
                   <a:txBody>
-                    <a:bodyPr wrap="square"/>
+                    <a:bodyPr/>
                     <a:lstStyle/>
                     <a:p>
                       <a:pPr algn="ctr"/>
@@ -11652,11 +11826,16 @@
                     </a:solidFill>
                   </a:tcPr>
                 </a:tc>
+                <a:extLst>
+                  <a:ext uri="{0D108BD9-81ED-4DB2-BD59-A6C34878D82A}">
+                    <a16:rowId xmlns:a16="http://schemas.microsoft.com/office/drawing/2014/main" val="10000"/>
+                  </a:ext>
+                </a:extLst>
               </a:tr>
               <a:tr h="457200">
                 <a:tc>
                   <a:txBody>
-                    <a:bodyPr wrap="square"/>
+                    <a:bodyPr/>
                     <a:lstStyle/>
                     <a:p>
                       <a:pPr algn="l"/>
@@ -11680,7 +11859,7 @@
                 </a:tc>
                 <a:tc>
                   <a:txBody>
-                    <a:bodyPr wrap="square"/>
+                    <a:bodyPr/>
                     <a:lstStyle/>
                     <a:p>
                       <a:pPr algn="ctr"/>
@@ -11704,7 +11883,7 @@
                 </a:tc>
                 <a:tc>
                   <a:txBody>
-                    <a:bodyPr wrap="square"/>
+                    <a:bodyPr/>
                     <a:lstStyle/>
                     <a:p>
                       <a:pPr algn="ctr"/>
@@ -11726,11 +11905,16 @@
                     </a:solidFill>
                   </a:tcPr>
                 </a:tc>
+                <a:extLst>
+                  <a:ext uri="{0D108BD9-81ED-4DB2-BD59-A6C34878D82A}">
+                    <a16:rowId xmlns:a16="http://schemas.microsoft.com/office/drawing/2014/main" val="10001"/>
+                  </a:ext>
+                </a:extLst>
               </a:tr>
               <a:tr h="457200">
                 <a:tc>
                   <a:txBody>
-                    <a:bodyPr wrap="square"/>
+                    <a:bodyPr/>
                     <a:lstStyle/>
                     <a:p>
                       <a:pPr algn="l"/>
@@ -11754,7 +11938,7 @@
                 </a:tc>
                 <a:tc>
                   <a:txBody>
-                    <a:bodyPr wrap="square"/>
+                    <a:bodyPr/>
                     <a:lstStyle/>
                     <a:p>
                       <a:pPr algn="ctr"/>
@@ -11778,7 +11962,7 @@
                 </a:tc>
                 <a:tc>
                   <a:txBody>
-                    <a:bodyPr wrap="square"/>
+                    <a:bodyPr/>
                     <a:lstStyle/>
                     <a:p>
                       <a:pPr algn="ctr"/>
@@ -11800,11 +11984,16 @@
                     </a:solidFill>
                   </a:tcPr>
                 </a:tc>
+                <a:extLst>
+                  <a:ext uri="{0D108BD9-81ED-4DB2-BD59-A6C34878D82A}">
+                    <a16:rowId xmlns:a16="http://schemas.microsoft.com/office/drawing/2014/main" val="10002"/>
+                  </a:ext>
+                </a:extLst>
               </a:tr>
               <a:tr h="457200">
                 <a:tc>
                   <a:txBody>
-                    <a:bodyPr wrap="square"/>
+                    <a:bodyPr/>
                     <a:lstStyle/>
                     <a:p>
                       <a:pPr algn="l"/>
@@ -11828,7 +12017,7 @@
                 </a:tc>
                 <a:tc>
                   <a:txBody>
-                    <a:bodyPr wrap="square"/>
+                    <a:bodyPr/>
                     <a:lstStyle/>
                     <a:p>
                       <a:pPr algn="ctr"/>
@@ -11852,7 +12041,7 @@
                 </a:tc>
                 <a:tc>
                   <a:txBody>
-                    <a:bodyPr wrap="square"/>
+                    <a:bodyPr/>
                     <a:lstStyle/>
                     <a:p>
                       <a:pPr algn="ctr"/>
@@ -11874,11 +12063,16 @@
                     </a:solidFill>
                   </a:tcPr>
                 </a:tc>
+                <a:extLst>
+                  <a:ext uri="{0D108BD9-81ED-4DB2-BD59-A6C34878D82A}">
+                    <a16:rowId xmlns:a16="http://schemas.microsoft.com/office/drawing/2014/main" val="10003"/>
+                  </a:ext>
+                </a:extLst>
               </a:tr>
               <a:tr h="457200">
                 <a:tc>
                   <a:txBody>
-                    <a:bodyPr wrap="square"/>
+                    <a:bodyPr/>
                     <a:lstStyle/>
                     <a:p>
                       <a:pPr algn="l"/>
@@ -11902,7 +12096,7 @@
                 </a:tc>
                 <a:tc>
                   <a:txBody>
-                    <a:bodyPr wrap="square"/>
+                    <a:bodyPr/>
                     <a:lstStyle/>
                     <a:p>
                       <a:pPr algn="ctr"/>
@@ -11926,7 +12120,7 @@
                 </a:tc>
                 <a:tc>
                   <a:txBody>
-                    <a:bodyPr wrap="square"/>
+                    <a:bodyPr/>
                     <a:lstStyle/>
                     <a:p>
                       <a:pPr algn="ctr"/>
@@ -11948,6 +12142,11 @@
                     </a:solidFill>
                   </a:tcPr>
                 </a:tc>
+                <a:extLst>
+                  <a:ext uri="{0D108BD9-81ED-4DB2-BD59-A6C34878D82A}">
+                    <a16:rowId xmlns:a16="http://schemas.microsoft.com/office/drawing/2014/main" val="10004"/>
+                  </a:ext>
+                </a:extLst>
               </a:tr>
             </a:tbl>
           </a:graphicData>
@@ -11970,7 +12169,7 @@
           <a:noFill/>
         </p:spPr>
         <p:txBody>
-          <a:bodyPr wrap="square" anchor="t" lIns="45720" rIns="45720">
+          <a:bodyPr wrap="square" lIns="45720" rIns="45720" anchor="t">
             <a:spAutoFit/>
           </a:bodyPr>
           <a:lstStyle/>
@@ -12044,7 +12243,7 @@
           <a:noFill/>
         </p:spPr>
         <p:txBody>
-          <a:bodyPr wrap="square" anchor="t" lIns="45720" rIns="45720">
+          <a:bodyPr wrap="square" lIns="45720" rIns="45720" anchor="t">
             <a:spAutoFit/>
           </a:bodyPr>
           <a:lstStyle/>
@@ -12084,7 +12283,7 @@
           <a:noFill/>
         </p:spPr>
         <p:txBody>
-          <a:bodyPr wrap="square" anchor="t" lIns="45720" rIns="45720">
+          <a:bodyPr wrap="square" lIns="45720" rIns="45720" anchor="t">
             <a:spAutoFit/>
           </a:bodyPr>
           <a:lstStyle/>
@@ -12116,7 +12315,7 @@
 </file>
 
 <file path=ppt/slides/slide9.xml><?xml version="1.0" encoding="utf-8"?>
-<p:sld xmlns:a="http://schemas.openxmlformats.org/drawingml/2006/main" xmlns:p="http://schemas.openxmlformats.org/presentationml/2006/main" xmlns:r="http://schemas.openxmlformats.org/officeDocument/2006/relationships">
+<p:sld xmlns:a="http://schemas.openxmlformats.org/drawingml/2006/main" xmlns:r="http://schemas.openxmlformats.org/officeDocument/2006/relationships" xmlns:p="http://schemas.openxmlformats.org/presentationml/2006/main">
   <p:cSld>
     <p:spTree>
       <p:nvGrpSpPr>
@@ -12124,7 +12323,14 @@
         <p:cNvGrpSpPr/>
         <p:nvPr/>
       </p:nvGrpSpPr>
-      <p:grpSpPr/>
+      <p:grpSpPr>
+        <a:xfrm>
+          <a:off x="0" y="0"/>
+          <a:ext cx="0" cy="0"/>
+          <a:chOff x="0" y="0"/>
+          <a:chExt cx="0" cy="0"/>
+        </a:xfrm>
+      </p:grpSpPr>
       <p:sp>
         <p:nvSpPr>
           <p:cNvPr id="2" name="TextBox 1"/>
@@ -12142,7 +12348,7 @@
           <a:noFill/>
         </p:spPr>
         <p:txBody>
-          <a:bodyPr wrap="square" anchor="t" lIns="45720" rIns="45720">
+          <a:bodyPr wrap="square" lIns="45720" rIns="45720" anchor="t">
             <a:spAutoFit/>
           </a:bodyPr>
           <a:lstStyle/>
@@ -12182,7 +12388,7 @@
           <a:noFill/>
         </p:spPr>
         <p:txBody>
-          <a:bodyPr wrap="square" anchor="t" lIns="45720" rIns="45720">
+          <a:bodyPr wrap="square" lIns="45720" rIns="45720" anchor="t">
             <a:spAutoFit/>
           </a:bodyPr>
           <a:lstStyle/>
@@ -12245,6 +12451,7 @@
           <a:lstStyle/>
           <a:p>
             <a:pPr algn="ctr"/>
+            <a:endParaRPr/>
           </a:p>
         </p:txBody>
       </p:sp>
@@ -12257,7 +12464,7 @@
           <p:nvPr/>
         </p:nvPicPr>
         <p:blipFill>
-          <a:blip r:embed="rId2"/>
+          <a:blip r:embed="rId3"/>
           <a:stretch>
             <a:fillRect/>
           </a:stretch>
@@ -12312,6 +12519,7 @@
           <a:lstStyle/>
           <a:p>
             <a:pPr algn="ctr"/>
+            <a:endParaRPr/>
           </a:p>
         </p:txBody>
       </p:sp>
@@ -12332,7 +12540,7 @@
           <a:noFill/>
         </p:spPr>
         <p:txBody>
-          <a:bodyPr wrap="square" anchor="t" lIns="45720" rIns="45720">
+          <a:bodyPr wrap="square" lIns="45720" rIns="45720" anchor="t">
             <a:spAutoFit/>
           </a:bodyPr>
           <a:lstStyle/>
@@ -12372,7 +12580,7 @@
           <a:noFill/>
         </p:spPr>
         <p:txBody>
-          <a:bodyPr wrap="square" anchor="t" lIns="45720" rIns="45720">
+          <a:bodyPr wrap="square" lIns="45720" rIns="45720" anchor="t">
             <a:spAutoFit/>
           </a:bodyPr>
           <a:lstStyle/>
@@ -12463,7 +12671,7 @@
           <a:noFill/>
         </p:spPr>
         <p:txBody>
-          <a:bodyPr wrap="square" anchor="t" lIns="45720" rIns="45720">
+          <a:bodyPr wrap="square" lIns="45720" rIns="45720" anchor="t">
             <a:spAutoFit/>
           </a:bodyPr>
           <a:lstStyle/>
@@ -12503,7 +12711,7 @@
           <a:noFill/>
         </p:spPr>
         <p:txBody>
-          <a:bodyPr wrap="square" anchor="t" lIns="45720" rIns="45720">
+          <a:bodyPr wrap="square" lIns="45720" rIns="45720" anchor="t">
             <a:spAutoFit/>
           </a:bodyPr>
           <a:lstStyle/>
@@ -12855,7 +13063,7 @@
 </file>
 
 <file path=ppt/theme/theme2.xml><?xml version="1.0" encoding="utf-8"?>
-<a:theme xmlns:a="http://schemas.openxmlformats.org/drawingml/2006/main" name="Office Theme">
+<a:theme xmlns:a="http://schemas.openxmlformats.org/drawingml/2006/main" name="Office 主题​​">
   <a:themeElements>
     <a:clrScheme name="Office">
       <a:dk1>
@@ -12865,44 +13073,44 @@
         <a:sysClr val="window" lastClr="FFFFFF"/>
       </a:lt1>
       <a:dk2>
-        <a:srgbClr val="1F497D"/>
+        <a:srgbClr val="0E2841"/>
       </a:dk2>
       <a:lt2>
-        <a:srgbClr val="EEECE1"/>
+        <a:srgbClr val="E8E8E8"/>
       </a:lt2>
       <a:accent1>
-        <a:srgbClr val="4F81BD"/>
+        <a:srgbClr val="156082"/>
       </a:accent1>
       <a:accent2>
-        <a:srgbClr val="C0504D"/>
+        <a:srgbClr val="E97132"/>
       </a:accent2>
       <a:accent3>
-        <a:srgbClr val="9BBB59"/>
+        <a:srgbClr val="196B24"/>
       </a:accent3>
       <a:accent4>
-        <a:srgbClr val="8064A2"/>
+        <a:srgbClr val="0F9ED5"/>
       </a:accent4>
       <a:accent5>
-        <a:srgbClr val="4BACC6"/>
+        <a:srgbClr val="A02B93"/>
       </a:accent5>
       <a:accent6>
-        <a:srgbClr val="F79646"/>
+        <a:srgbClr val="4EA72E"/>
       </a:accent6>
       <a:hlink>
-        <a:srgbClr val="0000FF"/>
+        <a:srgbClr val="467886"/>
       </a:hlink>
       <a:folHlink>
-        <a:srgbClr val="800080"/>
+        <a:srgbClr val="96607D"/>
       </a:folHlink>
     </a:clrScheme>
     <a:fontScheme name="Office">
       <a:majorFont>
-        <a:latin typeface="Calibri"/>
+        <a:latin typeface="等线 Light" panose="02110004020202020204"/>
         <a:ea typeface=""/>
         <a:cs typeface=""/>
-        <a:font script="Jpan" typeface="ＭＳ Ｐゴシック"/>
+        <a:font script="Jpan" typeface="游ゴシック Light"/>
         <a:font script="Hang" typeface="맑은 고딕"/>
-        <a:font script="Hans" typeface="宋体"/>
+        <a:font script="Hans" typeface="等线 Light"/>
         <a:font script="Hant" typeface="新細明體"/>
         <a:font script="Arab" typeface="Times New Roman"/>
         <a:font script="Hebr" typeface="Times New Roman"/>
@@ -12930,14 +13138,31 @@
         <a:font script="Viet" typeface="Times New Roman"/>
         <a:font script="Uigh" typeface="Microsoft Uighur"/>
         <a:font script="Geor" typeface="Sylfaen"/>
+        <a:font script="Armn" typeface="Arial"/>
+        <a:font script="Bugi" typeface="Leelawadee UI"/>
+        <a:font script="Bopo" typeface="Microsoft JhengHei"/>
+        <a:font script="Java" typeface="Javanese Text"/>
+        <a:font script="Lisu" typeface="Segoe UI"/>
+        <a:font script="Mymr" typeface="Myanmar Text"/>
+        <a:font script="Nkoo" typeface="Ebrima"/>
+        <a:font script="Olck" typeface="Nirmala UI"/>
+        <a:font script="Osma" typeface="Ebrima"/>
+        <a:font script="Phag" typeface="Phagspa"/>
+        <a:font script="Syrn" typeface="Estrangelo Edessa"/>
+        <a:font script="Syrj" typeface="Estrangelo Edessa"/>
+        <a:font script="Syre" typeface="Estrangelo Edessa"/>
+        <a:font script="Sora" typeface="Nirmala UI"/>
+        <a:font script="Tale" typeface="Microsoft Tai Le"/>
+        <a:font script="Talu" typeface="Microsoft New Tai Lue"/>
+        <a:font script="Tfng" typeface="Ebrima"/>
       </a:majorFont>
       <a:minorFont>
-        <a:latin typeface="Calibri"/>
+        <a:latin typeface="等线" panose="02110004020202020204"/>
         <a:ea typeface=""/>
         <a:cs typeface=""/>
-        <a:font script="Jpan" typeface="ＭＳ Ｐゴシック"/>
+        <a:font script="Jpan" typeface="游ゴシック"/>
         <a:font script="Hang" typeface="맑은 고딕"/>
-        <a:font script="Hans" typeface="宋体"/>
+        <a:font script="Hans" typeface="等线"/>
         <a:font script="Hant" typeface="新細明體"/>
         <a:font script="Arab" typeface="Arial"/>
         <a:font script="Hebr" typeface="Arial"/>
@@ -12965,6 +13190,23 @@
         <a:font script="Viet" typeface="Arial"/>
         <a:font script="Uigh" typeface="Microsoft Uighur"/>
         <a:font script="Geor" typeface="Sylfaen"/>
+        <a:font script="Armn" typeface="Arial"/>
+        <a:font script="Bugi" typeface="Leelawadee UI"/>
+        <a:font script="Bopo" typeface="Microsoft JhengHei"/>
+        <a:font script="Java" typeface="Javanese Text"/>
+        <a:font script="Lisu" typeface="Segoe UI"/>
+        <a:font script="Mymr" typeface="Myanmar Text"/>
+        <a:font script="Nkoo" typeface="Ebrima"/>
+        <a:font script="Olck" typeface="Nirmala UI"/>
+        <a:font script="Osma" typeface="Ebrima"/>
+        <a:font script="Phag" typeface="Phagspa"/>
+        <a:font script="Syrn" typeface="Estrangelo Edessa"/>
+        <a:font script="Syrj" typeface="Estrangelo Edessa"/>
+        <a:font script="Syre" typeface="Estrangelo Edessa"/>
+        <a:font script="Sora" typeface="Nirmala UI"/>
+        <a:font script="Tale" typeface="Microsoft Tai Le"/>
+        <a:font script="Talu" typeface="Microsoft New Tai Lue"/>
+        <a:font script="Tfng" typeface="Ebrima"/>
       </a:minorFont>
     </a:fontScheme>
     <a:fmtScheme name="Office">
@@ -12976,180 +13218,136 @@
           <a:gsLst>
             <a:gs pos="0">
               <a:schemeClr val="phClr">
-                <a:tint val="50000"/>
-                <a:satMod val="300000"/>
+                <a:lumMod val="110000"/>
+                <a:satMod val="105000"/>
+                <a:tint val="67000"/>
               </a:schemeClr>
             </a:gs>
-            <a:gs pos="35000">
+            <a:gs pos="50000">
               <a:schemeClr val="phClr">
-                <a:tint val="37000"/>
-                <a:satMod val="300000"/>
+                <a:lumMod val="105000"/>
+                <a:satMod val="103000"/>
+                <a:tint val="73000"/>
               </a:schemeClr>
             </a:gs>
             <a:gs pos="100000">
               <a:schemeClr val="phClr">
-                <a:tint val="15000"/>
-                <a:satMod val="350000"/>
+                <a:lumMod val="105000"/>
+                <a:satMod val="109000"/>
+                <a:tint val="81000"/>
               </a:schemeClr>
             </a:gs>
           </a:gsLst>
-          <a:lin ang="16200000" scaled="1"/>
+          <a:lin ang="5400000" scaled="0"/>
         </a:gradFill>
         <a:gradFill rotWithShape="1">
           <a:gsLst>
             <a:gs pos="0">
               <a:schemeClr val="phClr">
-                <a:tint val="100000"/>
+                <a:satMod val="103000"/>
+                <a:lumMod val="102000"/>
+                <a:tint val="94000"/>
+              </a:schemeClr>
+            </a:gs>
+            <a:gs pos="50000">
+              <a:schemeClr val="phClr">
+                <a:satMod val="110000"/>
+                <a:lumMod val="100000"/>
                 <a:shade val="100000"/>
-                <a:satMod val="130000"/>
               </a:schemeClr>
             </a:gs>
             <a:gs pos="100000">
               <a:schemeClr val="phClr">
-                <a:tint val="50000"/>
-                <a:shade val="100000"/>
-                <a:satMod val="350000"/>
+                <a:lumMod val="99000"/>
+                <a:satMod val="120000"/>
+                <a:shade val="78000"/>
               </a:schemeClr>
             </a:gs>
           </a:gsLst>
-          <a:lin ang="16200000" scaled="0"/>
+          <a:lin ang="5400000" scaled="0"/>
         </a:gradFill>
       </a:fillStyleLst>
       <a:lnStyleLst>
-        <a:ln w="9525" cap="flat" cmpd="sng" algn="ctr">
+        <a:ln w="12700" cap="flat" cmpd="sng" algn="ctr">
           <a:solidFill>
-            <a:schemeClr val="phClr">
-              <a:shade val="95000"/>
-              <a:satMod val="105000"/>
-            </a:schemeClr>
+            <a:schemeClr val="phClr"/>
           </a:solidFill>
           <a:prstDash val="solid"/>
+          <a:miter lim="800000"/>
+        </a:ln>
+        <a:ln w="19050" cap="flat" cmpd="sng" algn="ctr">
+          <a:solidFill>
+            <a:schemeClr val="phClr"/>
+          </a:solidFill>
+          <a:prstDash val="solid"/>
+          <a:miter lim="800000"/>
         </a:ln>
         <a:ln w="25400" cap="flat" cmpd="sng" algn="ctr">
           <a:solidFill>
             <a:schemeClr val="phClr"/>
           </a:solidFill>
           <a:prstDash val="solid"/>
-        </a:ln>
-        <a:ln w="38100" cap="flat" cmpd="sng" algn="ctr">
-          <a:solidFill>
-            <a:schemeClr val="phClr"/>
-          </a:solidFill>
-          <a:prstDash val="solid"/>
+          <a:miter lim="800000"/>
         </a:ln>
       </a:lnStyleLst>
       <a:effectStyleLst>
         <a:effectStyle>
+          <a:effectLst/>
+        </a:effectStyle>
+        <a:effectStyle>
+          <a:effectLst/>
+        </a:effectStyle>
+        <a:effectStyle>
           <a:effectLst>
-            <a:outerShdw blurRad="40000" dist="20000" dir="5400000" rotWithShape="0">
+            <a:outerShdw blurRad="57150" dist="19050" dir="5400000" algn="ctr" rotWithShape="0">
               <a:srgbClr val="000000">
-                <a:alpha val="38000"/>
+                <a:alpha val="63000"/>
               </a:srgbClr>
             </a:outerShdw>
           </a:effectLst>
-        </a:effectStyle>
-        <a:effectStyle>
-          <a:effectLst>
-            <a:outerShdw blurRad="40000" dist="23000" dir="5400000" rotWithShape="0">
-              <a:srgbClr val="000000">
-                <a:alpha val="35000"/>
-              </a:srgbClr>
-            </a:outerShdw>
-          </a:effectLst>
-        </a:effectStyle>
-        <a:effectStyle>
-          <a:effectLst>
-            <a:outerShdw blurRad="40000" dist="23000" dir="5400000" rotWithShape="0">
-              <a:srgbClr val="000000">
-                <a:alpha val="35000"/>
-              </a:srgbClr>
-            </a:outerShdw>
-          </a:effectLst>
-          <a:scene3d>
-            <a:camera prst="orthographicFront">
-              <a:rot lat="0" lon="0" rev="0"/>
-            </a:camera>
-            <a:lightRig rig="threePt" dir="t">
-              <a:rot lat="0" lon="0" rev="1200000"/>
-            </a:lightRig>
-          </a:scene3d>
-          <a:sp3d>
-            <a:bevelT w="63500" h="25400"/>
-          </a:sp3d>
         </a:effectStyle>
       </a:effectStyleLst>
       <a:bgFillStyleLst>
         <a:solidFill>
           <a:schemeClr val="phClr"/>
         </a:solidFill>
+        <a:solidFill>
+          <a:schemeClr val="phClr">
+            <a:tint val="95000"/>
+            <a:satMod val="170000"/>
+          </a:schemeClr>
+        </a:solidFill>
         <a:gradFill rotWithShape="1">
           <a:gsLst>
             <a:gs pos="0">
               <a:schemeClr val="phClr">
-                <a:tint val="40000"/>
-                <a:satMod val="350000"/>
+                <a:tint val="93000"/>
+                <a:satMod val="150000"/>
+                <a:shade val="98000"/>
+                <a:lumMod val="102000"/>
               </a:schemeClr>
             </a:gs>
-            <a:gs pos="40000">
+            <a:gs pos="50000">
               <a:schemeClr val="phClr">
-                <a:tint val="45000"/>
-                <a:shade val="99000"/>
-                <a:satMod val="350000"/>
+                <a:tint val="98000"/>
+                <a:satMod val="130000"/>
+                <a:shade val="90000"/>
+                <a:lumMod val="103000"/>
               </a:schemeClr>
             </a:gs>
             <a:gs pos="100000">
               <a:schemeClr val="phClr">
-                <a:shade val="20000"/>
-                <a:satMod val="255000"/>
+                <a:shade val="63000"/>
+                <a:satMod val="120000"/>
               </a:schemeClr>
             </a:gs>
           </a:gsLst>
-          <a:path path="circle">
-            <a:fillToRect l="50000" t="-80000" r="50000" b="180000"/>
-          </a:path>
-        </a:gradFill>
-        <a:gradFill rotWithShape="1">
-          <a:gsLst>
-            <a:gs pos="0">
-              <a:schemeClr val="phClr">
-                <a:tint val="80000"/>
-                <a:satMod val="300000"/>
-              </a:schemeClr>
-            </a:gs>
-            <a:gs pos="100000">
-              <a:schemeClr val="phClr">
-                <a:shade val="30000"/>
-                <a:satMod val="200000"/>
-              </a:schemeClr>
-            </a:gs>
-          </a:gsLst>
-          <a:path path="circle">
-            <a:fillToRect l="50000" t="50000" r="50000" b="50000"/>
-          </a:path>
+          <a:lin ang="5400000" scaled="0"/>
         </a:gradFill>
       </a:bgFillStyleLst>
     </a:fmtScheme>
   </a:themeElements>
   <a:objectDefaults>
-    <a:spDef>
-      <a:spPr/>
-      <a:bodyPr/>
-      <a:lstStyle/>
-      <a:style>
-        <a:lnRef idx="1">
-          <a:schemeClr val="accent1"/>
-        </a:lnRef>
-        <a:fillRef idx="3">
-          <a:schemeClr val="accent1"/>
-        </a:fillRef>
-        <a:effectRef idx="2">
-          <a:schemeClr val="accent1"/>
-        </a:effectRef>
-        <a:fontRef idx="minor">
-          <a:schemeClr val="lt1"/>
-        </a:fontRef>
-      </a:style>
-    </a:spDef>
     <a:lnDef>
       <a:spPr/>
       <a:bodyPr/>
@@ -13171,5 +13369,10 @@
     </a:lnDef>
   </a:objectDefaults>
   <a:extraClrSchemeLst/>
+  <a:extLst>
+    <a:ext uri="{05A4C25C-085E-4340-85A3-A5531E510DB2}">
+      <thm15:themeFamily xmlns:thm15="http://schemas.microsoft.com/office/thememl/2012/main" name="Office Theme" id="{2E142A2C-CD16-42D6-873A-C26D2A0506FA}" vid="{1BDDFF52-6CD6-40A5-AB3C-68EB2F1E4D0A}"/>
+    </a:ext>
+  </a:extLst>
 </a:theme>
 </file>